--- a/it/slides/01-Architettura_dei_Calcolatori-PRG32_e_PRG32-QT_Installazione.pptx
+++ b/it/slides/01-Architettura_dei_Calcolatori-PRG32_e_PRG32-QT_Installazione.pptx
@@ -122,14 +122,14 @@
   <p:extLst>
     <p:ext uri="{521415D9-36F7-43E2-AB2F-B90AF26B5E84}">
       <p14:sectionLst xmlns:p14="http://schemas.microsoft.com/office/powerpoint/2010/main">
-        <p14:section name="Apertura" id="{77d2936c-322b-291b-6b13-6c26cf9c074b}">
+        <p14:section name="Apertura" id="{0d48919b-4566-913c-9328-940252fe30b6}">
           <p14:sldIdLst>
             <p14:sldId id="256"/>
             <p14:sldId id="257"/>
             <p14:sldId id="258"/>
           </p14:sldIdLst>
         </p14:section>
-        <p14:section name="La piattaforma, in dettaglio" id="{8d6e8f0e-448a-7f2f-3a4a-137b78f83373}">
+        <p14:section name="La piattaforma, in dettaglio" id="{dfce3317-24e0-e64f-ce63-4eb0a65d2181}">
           <p14:sldIdLst>
             <p14:sldId id="259"/>
             <p14:sldId id="260"/>
@@ -139,12 +139,12 @@
             <p14:sldId id="264"/>
           </p14:sldIdLst>
         </p14:section>
-        <p14:section name="Passo 2: installare la toolchain" id="{e4b6af03-74f5-7234-5af6-d41aa600ac6d}">
+        <p14:section name="Passo 2: installare la toolchain" id="{81d926e9-3545-297c-40a2-c40e34ee326a}">
           <p14:sldIdLst>
             <p14:sldId id="265"/>
           </p14:sldIdLst>
         </p14:section>
-        <p14:section name="Quando qualcosa non funziona" id="{5b215689-a232-013c-b03d-8f90db3d03cf}">
+        <p14:section name="Quando qualcosa non funziona" id="{cd695276-edfb-f223-2cf5-b9f3d1574b3a}">
           <p14:sldIdLst>
             <p14:sldId id="266"/>
             <p14:sldId id="267"/>
@@ -2924,7 +2924,63 @@
       </p:sp>
       <p:sp>
         <p:nvSpPr>
-          <p:cNvPr id="12" name="Shape 10"/>
+          <p:cNvPr id="12" name="Text 10"/>
+          <p:cNvSpPr txBox="1"/>
+          <p:nvPr/>
+        </p:nvSpPr>
+        <p:spPr>
+          <a:xfrm>
+            <a:off x="4693615" y="566928"/>
+            <a:ext cx="6949440" cy="640080"/>
+          </a:xfrm>
+          <a:prstGeom prst="rect">
+            <a:avLst/>
+          </a:prstGeom>
+          <a:noFill/>
+          <a:ln/>
+        </p:spPr>
+        <p:txBody>
+          <a:bodyPr wrap="square" lIns="0" tIns="0" rIns="0" bIns="0" rtlCol="0" anchor="t"/>
+          <a:lstStyle/>
+          <a:p>
+            <a:pPr algn="r" indent="0" marL="0">
+              <a:buNone/>
+            </a:pPr>
+            <a:r>
+              <a:rPr lang="en-US" sz="1300" dirty="0">
+                <a:solidFill>
+                  <a:srgbClr val="CFE3EA"/>
+                </a:solidFill>
+                <a:latin typeface="Calibri" pitchFamily="34" charset="0"/>
+                <a:ea typeface="Calibri" pitchFamily="34" charset="-122"/>
+                <a:cs typeface="Calibri" pitchFamily="34" charset="-120"/>
+              </a:rPr>
+              <a:t>Presentazione della lezione. I listati, il programma completo e come provarlo sono nella presentazione del codice:</a:t>
+            </a:r>
+            <a:endParaRPr lang="en-US" sz="1300" dirty="0"/>
+          </a:p>
+          <a:p>
+            <a:pPr algn="r" indent="0" marL="0">
+              <a:buNone/>
+            </a:pPr>
+            <a:r>
+              <a:rPr lang="en-US" sz="1300" dirty="0">
+                <a:solidFill>
+                  <a:srgbClr val="CFE3EA"/>
+                </a:solidFill>
+                <a:latin typeface="Calibri" pitchFamily="34" charset="0"/>
+                <a:ea typeface="Calibri" pitchFamily="34" charset="-122"/>
+                <a:cs typeface="Calibri" pitchFamily="34" charset="-120"/>
+              </a:rPr>
+              <a:t>01-Architettura_dei_Calcolatori-PRG32_e_PRG32-QT_Installazione-Codice.pptx</a:t>
+            </a:r>
+            <a:endParaRPr lang="en-US" sz="1300" dirty="0"/>
+          </a:p>
+        </p:txBody>
+      </p:sp>
+      <p:sp>
+        <p:nvSpPr>
+          <p:cNvPr id="13" name="Shape 11"/>
           <p:cNvSpPr/>
           <p:nvPr/>
         </p:nvSpPr>
@@ -2951,7 +3007,7 @@
       </p:sp>
       <p:pic>
         <p:nvPicPr>
-          <p:cNvPr id="13" name="Image 0" descr="/Users/raffaelemontella/devel/riscv-prg32/computer-architecture-with-prg32/tools/assets/prg32qt_debugger.png">    </p:cNvPr>
+          <p:cNvPr id="14" name="Image 0" descr="/Users/raffaelemontella/devel/riscv-prg32/computer-architecture-with-prg32/tools/assets/prg32qt_debugger.png">    </p:cNvPr>
           <p:cNvPicPr>
             <a:picLocks noChangeAspect="1"/>
           </p:cNvPicPr>

--- a/it/slides/01-Architettura_dei_Calcolatori-PRG32_e_PRG32-QT_Installazione.pptx
+++ b/it/slides/01-Architettura_dei_Calcolatori-PRG32_e_PRG32-QT_Installazione.pptx
@@ -122,14 +122,14 @@
   <p:extLst>
     <p:ext uri="{521415D9-36F7-43E2-AB2F-B90AF26B5E84}">
       <p14:sectionLst xmlns:p14="http://schemas.microsoft.com/office/powerpoint/2010/main">
-        <p14:section name="Apertura" id="{0d48919b-4566-913c-9328-940252fe30b6}">
+        <p14:section name="Apertura" id="{78167417-dd44-2dc1-c145-fd025a90b8b7}">
           <p14:sldIdLst>
             <p14:sldId id="256"/>
             <p14:sldId id="257"/>
             <p14:sldId id="258"/>
           </p14:sldIdLst>
         </p14:section>
-        <p14:section name="La piattaforma, in dettaglio" id="{dfce3317-24e0-e64f-ce63-4eb0a65d2181}">
+        <p14:section name="La piattaforma, in dettaglio" id="{c68b0083-a34a-c290-4b53-1b6e8a059a11}">
           <p14:sldIdLst>
             <p14:sldId id="259"/>
             <p14:sldId id="260"/>
@@ -139,12 +139,12 @@
             <p14:sldId id="264"/>
           </p14:sldIdLst>
         </p14:section>
-        <p14:section name="Passo 2: installare la toolchain" id="{81d926e9-3545-297c-40a2-c40e34ee326a}">
+        <p14:section name="Passo 2: installare la toolchain" id="{65ca51d0-2939-3212-bca7-e12aa4ff2c43}">
           <p14:sldIdLst>
             <p14:sldId id="265"/>
           </p14:sldIdLst>
         </p14:section>
-        <p14:section name="Quando qualcosa non funziona" id="{cd695276-edfb-f223-2cf5-b9f3d1574b3a}">
+        <p14:section name="Quando qualcosa non funziona" id="{e8405835-893f-e27b-a30f-ab1e35793088}">
           <p14:sldIdLst>
             <p14:sldId id="266"/>
             <p14:sldId id="267"/>
@@ -559,6 +559,8 @@
             <a:r>
               <a:rPr lang="en-US" dirty="0"/>
               <a:t>Questa lezione è un'officina, in due sensi: si lavora con le mani, e si esce con un posto in cui costruire cose. Qui non c'è teoria. Alla fine il vostro portatile esegue PRG32-QT, il compilatore per RISC-V è installato, e una cartuccia compilata da voi è ferma nel debugger. La citazione sull'ascia giustifica le due ore spese sugli strumenti: ogni lezione successiva presuppone che compilare ed eseguire un programma vi costi un comando e dieci secondi.
+Stato di apprendimento: DA COMPRENDERE OGGI, alla fine di questa lezione lo spiegate, lo seguite passo passo e lo applicate da soli; DA UTILIZZARE OGGI, oggi seguite e usate la ricetta; come funziona dentro si spiega più avanti, o non fa parte del corso; DA COMPRENDERE PIÙ AVANTI, riconoscete il nome e lo scopo; lo spiega una lezione successiva. Una slide senza etichetta è contesto: una storia, un esempio, una domanda, un esercizio.
+Stato di apprendimento di questa lezione. DA COMPRENDERE OGGI: i componenti di PRG32. DA UTILIZZARE OGGI: gli strumenti di PRG32, il debugger di PRG32-QT, il programma completo (si usa, non si studia, in questo corso). DA COMPRENDERE PIÙ AVANTI: contratto init/update/draw (Lezione 02); i registri (Lezione 02). Una slide senza etichetta è contesto: una storia, un esempio, una domanda, un esercizio.
 Per il docente: Novità del 2026/27: una lezione pratica. Gli studenti portano il portatile; alla fine ognuno ha PRG32-QT funzionante e una cartuccia compilata con la propria toolchain. I passi vengono dal README di PRG32, dalla documentazione di PRG32-QT e dal capitolo 3 del libro di PRG32. I comandi del passo 3 sono stati eseguiti su macOS con PRG32-QT; le installazioni su Windows e Linux seguono le istruzioni ufficiali e non sono state eseguite per queste slide. Chiedere agli studenti di fare a casa, prima della lezione, il lungo scaricamento del passo 2: la rete dell'aula non regge sessanta copie di ESP-IDF. I numeri di versione sono quelli di ottobre 2026: controllare le pagine dei rilasci prima della lezione.</a:t>
             </a:r>
             <a:endParaRPr lang="en-US" dirty="0"/>
@@ -648,6 +650,7 @@
             <a:r>
               <a:rPr lang="en-US" dirty="0"/>
               <a:t>Un'idea sola spiega ogni installazione e quasi ogni problema. Il compilatore arriva con ESP-IDF, il kit di sviluppo di Espressif, installato per due chip: esp32c6, il kit, ed esp32c3, l'emulatore. Ma ESP-IDF non è attivo da solo: ogni nuovo terminale deve attivarlo prima che gli strumenti si possano trovare. Il riquadro a destra mostra il messaggio che incontrerete di sicuro, idf.py: command not found. Non significa che qualcosa è rotto. Significa che ESP-IDF non è attivo nel terminale in cui state scrivendo.
+DA UTILIZZARE OGGI: gli strumenti di PRG32 (si usa, non si studia, in questo corso).
 Per il docente: Su Windows attivare significa aprire ESP-IDF PowerShell; su macOS e Linux, eseguire export.sh. Il sintomo è sempre lo stesso: idf.py, oppure riscv32-esp-elf-gcc, non trovato.</a:t>
             </a:r>
             <a:endParaRPr lang="en-US" dirty="0"/>
@@ -737,6 +740,7 @@
             <a:r>
               <a:rPr lang="en-US" dirty="0"/>
               <a:t>Leggete la tabella da sinistra a destra: che cosa vedete, che cosa significa, che cosa fare. La prima riga copre la maggior parte dei casi: idf.py: command not found significa che ESP-IDF non è attivo in questo terminale. No module named prg32 significa che non siete nella cartella PRG32. Una connessione rifiutata significa che PRG32-QT non è in esecuzione, o che un firewall blocca la porta 8080. Quando chiedete aiuto, incollate il comando e il messaggio completo come testo: una fotografia dello schermo non si può né cercare né copiare.
+DA UTILIZZARE OGGI: gli strumenti di PRG32 (si usa, non si studia, in questo corso).
 Per il docente: La prima riga copre la maggior parte dei casi. docs/usage/troubleshooting.md del repository di PRG32 ha l'elenco completo. Quando chiedete aiuto, incollate il comando e l'intero messaggio: mai una fotografia dello schermo.</a:t>
             </a:r>
             <a:endParaRPr lang="en-US" dirty="0"/>
@@ -1183,6 +1187,7 @@
             <a:r>
               <a:rPr lang="en-US" dirty="0"/>
               <a:t>Quattro frasi da tenere. PRG32 è un runtime, un formato di cartuccia, uno strumento e uno Store, e una cartuccia gira invariata su tre host. PRG32-QT basta per giocare e fare debug; ESP-IDF e il repository servono per compilare. ESP-IDF va attivato in ogni nuovo terminale. E avete completato il ciclo di tutto il corso: compilare, inviare, fermare nel debugger. Le letture sono i file README dei due repository; la Lezione 02 usa questa officina per il vostro primo programma in assembly.
+Stato di apprendimento, riepilogo. DA COMPRENDERE OGGI: i componenti di PRG32. DA UTILIZZARE OGGI: gli strumenti di PRG32, il debugger di PRG32-QT, il programma completo (si usa, non si studia, in questo corso). DA COMPRENDERE PIÙ AVANTI: contratto init/update/draw (Lezione 02); i registri (Lezione 02). Una slide senza etichetta è contesto: una storia, un esempio, una domanda, un esercizio.
 Per il docente: A seguire: Lezione 02, il primo programma in assembly RISC-V, scritto dagli studenti nell'officina appena allestita.</a:t>
             </a:r>
             <a:endParaRPr lang="en-US" dirty="0"/>
@@ -1449,6 +1454,7 @@
             <a:r>
               <a:rPr lang="en-US" dirty="0"/>
               <a:t>Il nome PRG32 indica quattro cose. Un firmware, il programma residente che possiede schermo, pulsanti e suono. Un formato di cartuccia, il vostro gioco in un solo piccolo file. Uno strumento sul portatile, il comando python3 -m prg32, che compila, carica e impacchetta. E uno Store, dove si condividono i giochi finiti. Il vostro codice è vero codice macchina RISC-V a 32 bit, e incontra il firmware attraverso un contratto di tre funzioni: init, chiamata una volta, poi update e draw, chiamate a ogni frame. La Lezione 02 parte esattamente da questo contratto.
+DA COMPRENDERE OGGI: i componenti di PRG32.
 Per il docente: github.com/riscv-prg32/PRG32. Il runtime chiama init una volta, poi update e draw a ogni frame: la Lezione 02 parte da questo contratto.</a:t>
             </a:r>
             <a:endParaRPr lang="en-US" dirty="0"/>
@@ -1538,6 +1544,7 @@
             <a:r>
               <a:rPr lang="en-US" dirty="0"/>
               <a:t>Seguite un programma da sinistra a destra. Scrivete un file sorgente in assembly o in C. Il compilatore della toolchain RISC-V lo trasforma in codice macchina. Il risultato è una cartuccia, un file con codice, dati e una breve intestazione. La cartuccia viene caricata via rete su un host, e lì il runtime ne chiama le tre funzioni. I primi tre riquadri stanno sul portatile e richiedono il livello 2; gli ultimi due sono un host, che può essere PRG32-QT, QEMU o la scheda. Lo stesso file gira su tutti e tre perché raggiunge il runtime attraverso una tabella di funzioni, l'ABI.
+DA COMPRENDERE OGGI: i componenti di PRG32.
 Per il docente: Il compilatore è riscv32-esp-elf-gcc, installato da ESP-IDF. La cartuccia viene caricata all'indirizzo 0x40800000 e raggiunge il runtime attraverso una tabella di funzioni, l'ABI: per questo lo stesso file gira su tre host diversi.</a:t>
             </a:r>
             <a:endParaRPr lang="en-US" dirty="0"/>
@@ -1627,6 +1634,7 @@
             <a:r>
               <a:rPr lang="en-US" dirty="0"/>
               <a:t>Il kit è una piccola console montata su breadboard. Il suo cuore è un ESP32-C6, un chip con un core RISC-V a 160 MHz e il Wi-Fi. Attorno ci sono un display a colori da 2,8 pollici, uno o due amplificatori audio, un joystick e qualche pulsante, ciascuno collegato direttamente a un piedino del chip. Notate i due numeri dello schermo: il pannello ha 320 per 240 pixel, e i giochi disegnano in un'area di 320 per 200. Il gioco arriva alla scheda via Wi-Fi. Per seguire il corso il kit non serve; il laboratorio ne ha alcuni.
+DA COMPRENDERE OGGI: i componenti di PRG32.
 Per il docente: Display: ILI9341 su SPI. Audio: MAX98357A su I2S. L'elenco dei componenti e i collegamenti sono in docs/hardware del repository di PRG32. Il laboratorio dispone di kit.</a:t>
             </a:r>
             <a:endParaRPr lang="en-US" dirty="0"/>
@@ -1716,6 +1724,7 @@
             <a:r>
               <a:rPr lang="en-US" dirty="0"/>
               <a:t>Una cartuccia, tre host. Leggete la tabella per righe. Sulla scheda e in QEMU il codice gira in modo nativo, su un chip vero o emulato; in PRG32-QT è interpretato, un'istruzione dopo l'altra. Scheda e QEMU richiedono la toolchain; PRG32-QT no, per giocare e fare debug. L'esecuzione passo-passo richiede strumenti aggiuntivi sui primi due, ed è integrata nel terzo. Una regola pratica: usate la scheda quando volete la verità sul tempo, e PRG32-QT quando volete la verità su un registro.
+DA COMPRENDERE OGGI: i componenti di PRG32.
 Per il docente: Usate la scheda quando volete la verità sul tempo, e PRG32-QT quando volete la verità su un registro. Perché un ESP32-C3 in QEMU? Espressif mantiene per quel chip un emulatore maturo e con grafica; esegue le stesse istruzioni RISC-V, e la cartuccia non se ne accorge.</a:t>
             </a:r>
             <a:endParaRPr lang="en-US" dirty="0"/>
@@ -1805,6 +1814,7 @@
             <a:r>
               <a:rPr lang="en-US" dirty="0"/>
               <a:t>PRG32-QT è la console in forma di applicazione: contiene un interprete di RV32IMAC e offre alla cartuccia le stesse funzioni del firmware. Tre cose da ricordare. I profili di velocità in Settings: Accurate, quello predefinito, temporizzato come l'ESP32-C6; Optimal, trenta frame al secondo; Unlimited. Il navigatore dello Store, che scarica ed esegue le cartucce pubblicate. E il debugger, che mostra assembly, registri e memoria ed esegue un'istruzione alla volta. Accurate è il profilo da tenere: vi dice quando il vostro programma sarebbe troppo lento sul chip vero.
+DA COMPRENDERE OGGI: i componenti di PRG32.
 Per il docente: github.com/riscv-prg32/PRG32-QT. Accurate addebita a ogni istruzione e a ogni chiamata un costo in cicli di un clock a 160 MHz: non è un modello esatto al ciclo del chip, ma è abbastanza vicino da far vedere quando un frame è in ritardo.</a:t>
             </a:r>
             <a:endParaRPr lang="en-US" dirty="0"/>
@@ -1894,6 +1904,7 @@
             <a:r>
               <a:rPr lang="en-US" dirty="0"/>
               <a:t>Sulla tastiera il joystick sono i tasti freccia, oppure W A S D; il pulsante A è Z oppure J; il pulsante B è X oppure K; Start e Select sono Invio oppure Spazio. In PRG32-QT, Esc lascia il gioco e torna a Setup. Un dettaglio di QEMU sorprende tutti la prima volta: i tasti vanno battuti nel terminale da cui QEMU è stato avviato, non nella finestra che mostra l'immagine. Se un gioco in QEMU sembra morto, cliccate sul terminale.
+DA COMPRENDERE OGGI: i componenti di PRG32.
 Per il docente: Un controller di gioco USB o Bluetooth viene riconosciuto da PRG32-QT appena lo si collega. QEMU legge la tastiera dal terminale che lo ha lanciato, non dalla finestra con l'immagine: la sorpresa classica.</a:t>
             </a:r>
             <a:endParaRPr lang="en-US" dirty="0"/>
@@ -3031,6 +3042,420 @@
       </p:pic>
       <p:sp>
         <p:nvSpPr>
+          <p:cNvPr id="15" name="Shape 12"/>
+          <p:cNvSpPr/>
+          <p:nvPr/>
+        </p:nvSpPr>
+        <p:spPr>
+          <a:xfrm>
+            <a:off x="8910777" y="91440"/>
+            <a:ext cx="2732278" cy="274320"/>
+          </a:xfrm>
+          <a:prstGeom prst="rect">
+            <a:avLst/>
+          </a:prstGeom>
+          <a:solidFill>
+            <a:srgbClr val="F3E8FF"/>
+          </a:solidFill>
+          <a:ln w="12700">
+            <a:solidFill>
+              <a:srgbClr val="7E22CE"/>
+            </a:solidFill>
+            <a:prstDash val="dash"/>
+          </a:ln>
+        </p:spPr>
+      </p:sp>
+      <p:sp>
+        <p:nvSpPr>
+          <p:cNvPr id="16" name="Shape 13"/>
+          <p:cNvSpPr/>
+          <p:nvPr/>
+        </p:nvSpPr>
+        <p:spPr>
+          <a:xfrm>
+            <a:off x="8938209" y="128016"/>
+            <a:ext cx="45720" cy="45720"/>
+          </a:xfrm>
+          <a:prstGeom prst="rect">
+            <a:avLst/>
+          </a:prstGeom>
+          <a:solidFill>
+            <a:srgbClr val="7E22CE"/>
+          </a:solidFill>
+          <a:ln w="12700">
+            <a:solidFill>
+              <a:srgbClr val="7E22CE"/>
+            </a:solidFill>
+            <a:prstDash val="solid"/>
+          </a:ln>
+        </p:spPr>
+      </p:sp>
+      <p:sp>
+        <p:nvSpPr>
+          <p:cNvPr id="17" name="Shape 14"/>
+          <p:cNvSpPr/>
+          <p:nvPr/>
+        </p:nvSpPr>
+        <p:spPr>
+          <a:xfrm>
+            <a:off x="8938209" y="205740"/>
+            <a:ext cx="45720" cy="45720"/>
+          </a:xfrm>
+          <a:prstGeom prst="rect">
+            <a:avLst/>
+          </a:prstGeom>
+          <a:solidFill>
+            <a:srgbClr val="7E22CE"/>
+          </a:solidFill>
+          <a:ln w="12700">
+            <a:solidFill>
+              <a:srgbClr val="7E22CE"/>
+            </a:solidFill>
+            <a:prstDash val="solid"/>
+          </a:ln>
+        </p:spPr>
+      </p:sp>
+      <p:sp>
+        <p:nvSpPr>
+          <p:cNvPr id="18" name="Shape 15"/>
+          <p:cNvSpPr/>
+          <p:nvPr/>
+        </p:nvSpPr>
+        <p:spPr>
+          <a:xfrm>
+            <a:off x="8938209" y="283464"/>
+            <a:ext cx="45720" cy="45720"/>
+          </a:xfrm>
+          <a:prstGeom prst="rect">
+            <a:avLst/>
+          </a:prstGeom>
+          <a:solidFill>
+            <a:srgbClr val="7E22CE"/>
+          </a:solidFill>
+          <a:ln w="12700">
+            <a:solidFill>
+              <a:srgbClr val="7E22CE"/>
+            </a:solidFill>
+            <a:prstDash val="solid"/>
+          </a:ln>
+        </p:spPr>
+      </p:sp>
+      <p:pic>
+        <p:nvPicPr>
+          <p:cNvPr id="19" name="Image 1" descr="preencoded.png">    </p:cNvPr>
+          <p:cNvPicPr>
+            <a:picLocks noChangeAspect="1"/>
+          </p:cNvPicPr>
+          <p:nvPr/>
+        </p:nvPicPr>
+        <p:blipFill>
+          <a:blip r:embed="rId2"/>
+          <a:stretch>
+            <a:fillRect/>
+          </a:stretch>
+        </p:blipFill>
+        <p:spPr>
+          <a:xfrm>
+            <a:off x="9038793" y="128016"/>
+            <a:ext cx="201168" cy="201168"/>
+          </a:xfrm>
+          <a:prstGeom prst="rect">
+            <a:avLst/>
+          </a:prstGeom>
+        </p:spPr>
+      </p:pic>
+      <p:sp>
+        <p:nvSpPr>
+          <p:cNvPr id="20" name="Text 16"/>
+          <p:cNvSpPr txBox="1"/>
+          <p:nvPr/>
+        </p:nvSpPr>
+        <p:spPr>
+          <a:xfrm>
+            <a:off x="9294825" y="91440"/>
+            <a:ext cx="2311654" cy="274320"/>
+          </a:xfrm>
+          <a:prstGeom prst="rect">
+            <a:avLst/>
+          </a:prstGeom>
+          <a:noFill/>
+          <a:ln/>
+        </p:spPr>
+        <p:txBody>
+          <a:bodyPr wrap="square" lIns="0" tIns="0" rIns="0" bIns="0" rtlCol="0" anchor="ctr"/>
+          <a:lstStyle/>
+          <a:p>
+            <a:pPr indent="0" marL="0">
+              <a:buNone/>
+            </a:pPr>
+            <a:r>
+              <a:rPr lang="en-US" sz="1100" b="1" dirty="0">
+                <a:solidFill>
+                  <a:srgbClr val="6B21A8"/>
+                </a:solidFill>
+                <a:latin typeface="Calibri" pitchFamily="34" charset="0"/>
+                <a:ea typeface="Calibri" pitchFamily="34" charset="-122"/>
+                <a:cs typeface="Calibri" pitchFamily="34" charset="-120"/>
+              </a:rPr>
+              <a:t>DA COMPRENDERE PIÙ AVANTI</a:t>
+            </a:r>
+            <a:endParaRPr lang="en-US" sz="1100" dirty="0"/>
+          </a:p>
+        </p:txBody>
+      </p:sp>
+      <p:sp>
+        <p:nvSpPr>
+          <p:cNvPr id="21" name="Shape 17"/>
+          <p:cNvSpPr/>
+          <p:nvPr/>
+        </p:nvSpPr>
+        <p:spPr>
+          <a:xfrm>
+            <a:off x="6675069" y="91440"/>
+            <a:ext cx="2125980" cy="274320"/>
+          </a:xfrm>
+          <a:prstGeom prst="rect">
+            <a:avLst/>
+          </a:prstGeom>
+          <a:solidFill>
+            <a:srgbClr val="FEF3C7"/>
+          </a:solidFill>
+          <a:ln w="12700">
+            <a:solidFill>
+              <a:srgbClr val="B45309"/>
+            </a:solidFill>
+            <a:prstDash val="solid"/>
+          </a:ln>
+        </p:spPr>
+      </p:sp>
+      <p:sp>
+        <p:nvSpPr>
+          <p:cNvPr id="22" name="Shape 18"/>
+          <p:cNvSpPr/>
+          <p:nvPr/>
+        </p:nvSpPr>
+        <p:spPr>
+          <a:xfrm>
+            <a:off x="6675069" y="91440"/>
+            <a:ext cx="27432" cy="274320"/>
+          </a:xfrm>
+          <a:prstGeom prst="rect">
+            <a:avLst/>
+          </a:prstGeom>
+          <a:solidFill>
+            <a:srgbClr val="B45309"/>
+          </a:solidFill>
+          <a:ln w="12700">
+            <a:solidFill>
+              <a:srgbClr val="B45309"/>
+            </a:solidFill>
+            <a:prstDash val="solid"/>
+          </a:ln>
+        </p:spPr>
+      </p:sp>
+      <p:sp>
+        <p:nvSpPr>
+          <p:cNvPr id="23" name="Shape 19"/>
+          <p:cNvSpPr/>
+          <p:nvPr/>
+        </p:nvSpPr>
+        <p:spPr>
+          <a:xfrm>
+            <a:off x="6729933" y="91440"/>
+            <a:ext cx="27432" cy="274320"/>
+          </a:xfrm>
+          <a:prstGeom prst="rect">
+            <a:avLst/>
+          </a:prstGeom>
+          <a:solidFill>
+            <a:srgbClr val="B45309"/>
+          </a:solidFill>
+          <a:ln w="12700">
+            <a:solidFill>
+              <a:srgbClr val="B45309"/>
+            </a:solidFill>
+            <a:prstDash val="solid"/>
+          </a:ln>
+        </p:spPr>
+      </p:sp>
+      <p:pic>
+        <p:nvPicPr>
+          <p:cNvPr id="24" name="Image 2" descr="preencoded.png">    </p:cNvPr>
+          <p:cNvPicPr>
+            <a:picLocks noChangeAspect="1"/>
+          </p:cNvPicPr>
+          <p:nvPr/>
+        </p:nvPicPr>
+        <p:blipFill>
+          <a:blip r:embed="rId3"/>
+          <a:stretch>
+            <a:fillRect/>
+          </a:stretch>
+        </p:blipFill>
+        <p:spPr>
+          <a:xfrm>
+            <a:off x="6803085" y="128016"/>
+            <a:ext cx="201168" cy="201168"/>
+          </a:xfrm>
+          <a:prstGeom prst="rect">
+            <a:avLst/>
+          </a:prstGeom>
+        </p:spPr>
+      </p:pic>
+      <p:sp>
+        <p:nvSpPr>
+          <p:cNvPr id="25" name="Text 20"/>
+          <p:cNvSpPr txBox="1"/>
+          <p:nvPr/>
+        </p:nvSpPr>
+        <p:spPr>
+          <a:xfrm>
+            <a:off x="7059117" y="91440"/>
+            <a:ext cx="1705356" cy="274320"/>
+          </a:xfrm>
+          <a:prstGeom prst="rect">
+            <a:avLst/>
+          </a:prstGeom>
+          <a:noFill/>
+          <a:ln/>
+        </p:spPr>
+        <p:txBody>
+          <a:bodyPr wrap="square" lIns="0" tIns="0" rIns="0" bIns="0" rtlCol="0" anchor="ctr"/>
+          <a:lstStyle/>
+          <a:p>
+            <a:pPr indent="0" marL="0">
+              <a:buNone/>
+            </a:pPr>
+            <a:r>
+              <a:rPr lang="en-US" sz="1100" b="1" dirty="0">
+                <a:solidFill>
+                  <a:srgbClr val="92400E"/>
+                </a:solidFill>
+                <a:latin typeface="Calibri" pitchFamily="34" charset="0"/>
+                <a:ea typeface="Calibri" pitchFamily="34" charset="-122"/>
+                <a:cs typeface="Calibri" pitchFamily="34" charset="-120"/>
+              </a:rPr>
+              <a:t>DA UTILIZZARE OGGI</a:t>
+            </a:r>
+            <a:endParaRPr lang="en-US" sz="1100" dirty="0"/>
+          </a:p>
+        </p:txBody>
+      </p:sp>
+      <p:sp>
+        <p:nvSpPr>
+          <p:cNvPr id="26" name="Shape 21"/>
+          <p:cNvSpPr/>
+          <p:nvPr/>
+        </p:nvSpPr>
+        <p:spPr>
+          <a:xfrm>
+            <a:off x="4352747" y="91440"/>
+            <a:ext cx="2212594" cy="274320"/>
+          </a:xfrm>
+          <a:prstGeom prst="rect">
+            <a:avLst/>
+          </a:prstGeom>
+          <a:solidFill>
+            <a:srgbClr val="E0F2FE"/>
+          </a:solidFill>
+          <a:ln w="12700">
+            <a:solidFill>
+              <a:srgbClr val="0369A1"/>
+            </a:solidFill>
+            <a:prstDash val="solid"/>
+          </a:ln>
+        </p:spPr>
+      </p:sp>
+      <p:sp>
+        <p:nvSpPr>
+          <p:cNvPr id="27" name="Shape 22"/>
+          <p:cNvSpPr/>
+          <p:nvPr/>
+        </p:nvSpPr>
+        <p:spPr>
+          <a:xfrm>
+            <a:off x="4352747" y="91440"/>
+            <a:ext cx="73152" cy="274320"/>
+          </a:xfrm>
+          <a:prstGeom prst="rect">
+            <a:avLst/>
+          </a:prstGeom>
+          <a:solidFill>
+            <a:srgbClr val="0369A1"/>
+          </a:solidFill>
+          <a:ln w="12700">
+            <a:solidFill>
+              <a:srgbClr val="0369A1"/>
+            </a:solidFill>
+            <a:prstDash val="solid"/>
+          </a:ln>
+        </p:spPr>
+      </p:sp>
+      <p:pic>
+        <p:nvPicPr>
+          <p:cNvPr id="28" name="Image 3" descr="preencoded.png">    </p:cNvPr>
+          <p:cNvPicPr>
+            <a:picLocks noChangeAspect="1"/>
+          </p:cNvPicPr>
+          <p:nvPr/>
+        </p:nvPicPr>
+        <p:blipFill>
+          <a:blip r:embed="rId4"/>
+          <a:stretch>
+            <a:fillRect/>
+          </a:stretch>
+        </p:blipFill>
+        <p:spPr>
+          <a:xfrm>
+            <a:off x="4480763" y="128016"/>
+            <a:ext cx="201168" cy="201168"/>
+          </a:xfrm>
+          <a:prstGeom prst="rect">
+            <a:avLst/>
+          </a:prstGeom>
+        </p:spPr>
+      </p:pic>
+      <p:sp>
+        <p:nvSpPr>
+          <p:cNvPr id="29" name="Text 23"/>
+          <p:cNvSpPr txBox="1"/>
+          <p:nvPr/>
+        </p:nvSpPr>
+        <p:spPr>
+          <a:xfrm>
+            <a:off x="4736795" y="91440"/>
+            <a:ext cx="1791970" cy="274320"/>
+          </a:xfrm>
+          <a:prstGeom prst="rect">
+            <a:avLst/>
+          </a:prstGeom>
+          <a:noFill/>
+          <a:ln/>
+        </p:spPr>
+        <p:txBody>
+          <a:bodyPr wrap="square" lIns="0" tIns="0" rIns="0" bIns="0" rtlCol="0" anchor="ctr"/>
+          <a:lstStyle/>
+          <a:p>
+            <a:pPr indent="0" marL="0">
+              <a:buNone/>
+            </a:pPr>
+            <a:r>
+              <a:rPr lang="en-US" sz="1100" b="1" dirty="0">
+                <a:solidFill>
+                  <a:srgbClr val="075985"/>
+                </a:solidFill>
+                <a:latin typeface="Calibri" pitchFamily="34" charset="0"/>
+                <a:ea typeface="Calibri" pitchFamily="34" charset="-122"/>
+                <a:cs typeface="Calibri" pitchFamily="34" charset="-120"/>
+              </a:rPr>
+              <a:t>DA COMPRENDERE OGGI</a:t>
+            </a:r>
+            <a:endParaRPr lang="en-US" sz="1100" dirty="0"/>
+          </a:p>
+        </p:txBody>
+      </p:sp>
+      <p:sp>
+        <p:nvSpPr>
           <p:cNvPr id="25" name="Slide Number Placeholder 0"/>
           <p:cNvSpPr>
             <a:spLocks noGrp="1"/>
@@ -3603,6 +4028,158 @@
               <a:t>ESP-IDF non è attivo in questo terminale. Attivatelo e riprovate.</a:t>
             </a:r>
             <a:endParaRPr lang="en-US" sz="1900" dirty="0"/>
+          </a:p>
+        </p:txBody>
+      </p:sp>
+      <p:sp>
+        <p:nvSpPr>
+          <p:cNvPr id="16" name="Shape 14"/>
+          <p:cNvSpPr/>
+          <p:nvPr/>
+        </p:nvSpPr>
+        <p:spPr>
+          <a:xfrm>
+            <a:off x="7875600" y="91440"/>
+            <a:ext cx="3767455" cy="274320"/>
+          </a:xfrm>
+          <a:prstGeom prst="rect">
+            <a:avLst/>
+          </a:prstGeom>
+          <a:solidFill>
+            <a:srgbClr val="FEF3C7"/>
+          </a:solidFill>
+          <a:ln w="12700">
+            <a:solidFill>
+              <a:srgbClr val="B45309"/>
+            </a:solidFill>
+            <a:prstDash val="solid"/>
+          </a:ln>
+        </p:spPr>
+      </p:sp>
+      <p:sp>
+        <p:nvSpPr>
+          <p:cNvPr id="17" name="Shape 15"/>
+          <p:cNvSpPr/>
+          <p:nvPr/>
+        </p:nvSpPr>
+        <p:spPr>
+          <a:xfrm>
+            <a:off x="7875600" y="91440"/>
+            <a:ext cx="27432" cy="274320"/>
+          </a:xfrm>
+          <a:prstGeom prst="rect">
+            <a:avLst/>
+          </a:prstGeom>
+          <a:solidFill>
+            <a:srgbClr val="B45309"/>
+          </a:solidFill>
+          <a:ln w="12700">
+            <a:solidFill>
+              <a:srgbClr val="B45309"/>
+            </a:solidFill>
+            <a:prstDash val="solid"/>
+          </a:ln>
+        </p:spPr>
+      </p:sp>
+      <p:sp>
+        <p:nvSpPr>
+          <p:cNvPr id="18" name="Shape 16"/>
+          <p:cNvSpPr/>
+          <p:nvPr/>
+        </p:nvSpPr>
+        <p:spPr>
+          <a:xfrm>
+            <a:off x="7930464" y="91440"/>
+            <a:ext cx="27432" cy="274320"/>
+          </a:xfrm>
+          <a:prstGeom prst="rect">
+            <a:avLst/>
+          </a:prstGeom>
+          <a:solidFill>
+            <a:srgbClr val="B45309"/>
+          </a:solidFill>
+          <a:ln w="12700">
+            <a:solidFill>
+              <a:srgbClr val="B45309"/>
+            </a:solidFill>
+            <a:prstDash val="solid"/>
+          </a:ln>
+        </p:spPr>
+      </p:sp>
+      <p:pic>
+        <p:nvPicPr>
+          <p:cNvPr id="19" name="Image 0" descr="preencoded.png">    </p:cNvPr>
+          <p:cNvPicPr>
+            <a:picLocks noChangeAspect="1"/>
+          </p:cNvPicPr>
+          <p:nvPr/>
+        </p:nvPicPr>
+        <p:blipFill>
+          <a:blip r:embed="rId1"/>
+          <a:stretch>
+            <a:fillRect/>
+          </a:stretch>
+        </p:blipFill>
+        <p:spPr>
+          <a:xfrm>
+            <a:off x="8003616" y="128016"/>
+            <a:ext cx="201168" cy="201168"/>
+          </a:xfrm>
+          <a:prstGeom prst="rect">
+            <a:avLst/>
+          </a:prstGeom>
+        </p:spPr>
+      </p:pic>
+      <p:sp>
+        <p:nvSpPr>
+          <p:cNvPr id="20" name="Text 17"/>
+          <p:cNvSpPr txBox="1"/>
+          <p:nvPr/>
+        </p:nvSpPr>
+        <p:spPr>
+          <a:xfrm>
+            <a:off x="8259648" y="91440"/>
+            <a:ext cx="3346831" cy="274320"/>
+          </a:xfrm>
+          <a:prstGeom prst="rect">
+            <a:avLst/>
+          </a:prstGeom>
+          <a:noFill/>
+          <a:ln/>
+        </p:spPr>
+        <p:txBody>
+          <a:bodyPr wrap="square" lIns="0" tIns="0" rIns="0" bIns="0" rtlCol="0" anchor="ctr"/>
+          <a:lstStyle/>
+          <a:p>
+            <a:pPr indent="0" marL="0">
+              <a:buNone/>
+            </a:pPr>
+            <a:r>
+              <a:rPr lang="en-US" sz="1100" b="1" dirty="0">
+                <a:solidFill>
+                  <a:srgbClr val="92400E"/>
+                </a:solidFill>
+                <a:latin typeface="Calibri" pitchFamily="34" charset="0"/>
+                <a:ea typeface="Calibri" pitchFamily="34" charset="-122"/>
+                <a:cs typeface="Calibri" pitchFamily="34" charset="-120"/>
+              </a:rPr>
+              <a:t>DA UTILIZZARE OGGI</a:t>
+            </a:r>
+            <a:pPr indent="0" marL="0">
+              <a:buNone/>
+            </a:pPr>
+            <a:r>
+              <a:rPr lang="en-US" sz="1100" dirty="0">
+                <a:solidFill>
+                  <a:srgbClr val="92400E"/>
+                </a:solidFill>
+                <a:latin typeface="Calibri" pitchFamily="34" charset="0"/>
+                <a:ea typeface="Calibri" pitchFamily="34" charset="-122"/>
+                <a:cs typeface="Calibri" pitchFamily="34" charset="-120"/>
+              </a:rPr>
+              <a:t> · gli strumenti di PRG32</a:t>
+            </a:r>
+            <a:endParaRPr lang="en-US" sz="1100" dirty="0"/>
           </a:p>
         </p:txBody>
       </p:sp>
@@ -5399,6 +5976,158 @@
           </a:graphicData>
         </a:graphic>
       </p:graphicFrame>
+      <p:sp>
+        <p:nvSpPr>
+          <p:cNvPr id="4" name="Shape 1"/>
+          <p:cNvSpPr/>
+          <p:nvPr/>
+        </p:nvSpPr>
+        <p:spPr>
+          <a:xfrm>
+            <a:off x="7875600" y="91440"/>
+            <a:ext cx="3767455" cy="274320"/>
+          </a:xfrm>
+          <a:prstGeom prst="rect">
+            <a:avLst/>
+          </a:prstGeom>
+          <a:solidFill>
+            <a:srgbClr val="FEF3C7"/>
+          </a:solidFill>
+          <a:ln w="12700">
+            <a:solidFill>
+              <a:srgbClr val="B45309"/>
+            </a:solidFill>
+            <a:prstDash val="solid"/>
+          </a:ln>
+        </p:spPr>
+      </p:sp>
+      <p:sp>
+        <p:nvSpPr>
+          <p:cNvPr id="5" name="Shape 2"/>
+          <p:cNvSpPr/>
+          <p:nvPr/>
+        </p:nvSpPr>
+        <p:spPr>
+          <a:xfrm>
+            <a:off x="7875600" y="91440"/>
+            <a:ext cx="27432" cy="274320"/>
+          </a:xfrm>
+          <a:prstGeom prst="rect">
+            <a:avLst/>
+          </a:prstGeom>
+          <a:solidFill>
+            <a:srgbClr val="B45309"/>
+          </a:solidFill>
+          <a:ln w="12700">
+            <a:solidFill>
+              <a:srgbClr val="B45309"/>
+            </a:solidFill>
+            <a:prstDash val="solid"/>
+          </a:ln>
+        </p:spPr>
+      </p:sp>
+      <p:sp>
+        <p:nvSpPr>
+          <p:cNvPr id="6" name="Shape 3"/>
+          <p:cNvSpPr/>
+          <p:nvPr/>
+        </p:nvSpPr>
+        <p:spPr>
+          <a:xfrm>
+            <a:off x="7930464" y="91440"/>
+            <a:ext cx="27432" cy="274320"/>
+          </a:xfrm>
+          <a:prstGeom prst="rect">
+            <a:avLst/>
+          </a:prstGeom>
+          <a:solidFill>
+            <a:srgbClr val="B45309"/>
+          </a:solidFill>
+          <a:ln w="12700">
+            <a:solidFill>
+              <a:srgbClr val="B45309"/>
+            </a:solidFill>
+            <a:prstDash val="solid"/>
+          </a:ln>
+        </p:spPr>
+      </p:sp>
+      <p:pic>
+        <p:nvPicPr>
+          <p:cNvPr id="7" name="Image 0" descr="preencoded.png">    </p:cNvPr>
+          <p:cNvPicPr>
+            <a:picLocks noChangeAspect="1"/>
+          </p:cNvPicPr>
+          <p:nvPr/>
+        </p:nvPicPr>
+        <p:blipFill>
+          <a:blip r:embed="rId1"/>
+          <a:stretch>
+            <a:fillRect/>
+          </a:stretch>
+        </p:blipFill>
+        <p:spPr>
+          <a:xfrm>
+            <a:off x="8003616" y="128016"/>
+            <a:ext cx="201168" cy="201168"/>
+          </a:xfrm>
+          <a:prstGeom prst="rect">
+            <a:avLst/>
+          </a:prstGeom>
+        </p:spPr>
+      </p:pic>
+      <p:sp>
+        <p:nvSpPr>
+          <p:cNvPr id="8" name="Text 4"/>
+          <p:cNvSpPr txBox="1"/>
+          <p:nvPr/>
+        </p:nvSpPr>
+        <p:spPr>
+          <a:xfrm>
+            <a:off x="8259648" y="91440"/>
+            <a:ext cx="3346831" cy="274320"/>
+          </a:xfrm>
+          <a:prstGeom prst="rect">
+            <a:avLst/>
+          </a:prstGeom>
+          <a:noFill/>
+          <a:ln/>
+        </p:spPr>
+        <p:txBody>
+          <a:bodyPr wrap="square" lIns="0" tIns="0" rIns="0" bIns="0" rtlCol="0" anchor="ctr"/>
+          <a:lstStyle/>
+          <a:p>
+            <a:pPr indent="0" marL="0">
+              <a:buNone/>
+            </a:pPr>
+            <a:r>
+              <a:rPr lang="en-US" sz="1100" b="1" dirty="0">
+                <a:solidFill>
+                  <a:srgbClr val="92400E"/>
+                </a:solidFill>
+                <a:latin typeface="Calibri" pitchFamily="34" charset="0"/>
+                <a:ea typeface="Calibri" pitchFamily="34" charset="-122"/>
+                <a:cs typeface="Calibri" pitchFamily="34" charset="-120"/>
+              </a:rPr>
+              <a:t>DA UTILIZZARE OGGI</a:t>
+            </a:r>
+            <a:pPr indent="0" marL="0">
+              <a:buNone/>
+            </a:pPr>
+            <a:r>
+              <a:rPr lang="en-US" sz="1100" dirty="0">
+                <a:solidFill>
+                  <a:srgbClr val="92400E"/>
+                </a:solidFill>
+                <a:latin typeface="Calibri" pitchFamily="34" charset="0"/>
+                <a:ea typeface="Calibri" pitchFamily="34" charset="-122"/>
+                <a:cs typeface="Calibri" pitchFamily="34" charset="-120"/>
+              </a:rPr>
+              <a:t> · gli strumenti di PRG32</a:t>
+            </a:r>
+            <a:endParaRPr lang="en-US" sz="1100" dirty="0"/>
+          </a:p>
+        </p:txBody>
+      </p:sp>
       <p:sp>
         <p:nvSpPr>
           <p:cNvPr id="25" name="Slide Number Placeholder 0"/>
@@ -13504,6 +14233,133 @@
       </p:sp>
       <p:sp>
         <p:nvSpPr>
+          <p:cNvPr id="13" name="Shape 10"/>
+          <p:cNvSpPr/>
+          <p:nvPr/>
+        </p:nvSpPr>
+        <p:spPr>
+          <a:xfrm>
+            <a:off x="7854645" y="91440"/>
+            <a:ext cx="3788410" cy="274320"/>
+          </a:xfrm>
+          <a:prstGeom prst="rect">
+            <a:avLst/>
+          </a:prstGeom>
+          <a:solidFill>
+            <a:srgbClr val="E0F2FE"/>
+          </a:solidFill>
+          <a:ln w="12700">
+            <a:solidFill>
+              <a:srgbClr val="0369A1"/>
+            </a:solidFill>
+            <a:prstDash val="solid"/>
+          </a:ln>
+        </p:spPr>
+      </p:sp>
+      <p:sp>
+        <p:nvSpPr>
+          <p:cNvPr id="14" name="Shape 11"/>
+          <p:cNvSpPr/>
+          <p:nvPr/>
+        </p:nvSpPr>
+        <p:spPr>
+          <a:xfrm>
+            <a:off x="7854645" y="91440"/>
+            <a:ext cx="73152" cy="274320"/>
+          </a:xfrm>
+          <a:prstGeom prst="rect">
+            <a:avLst/>
+          </a:prstGeom>
+          <a:solidFill>
+            <a:srgbClr val="0369A1"/>
+          </a:solidFill>
+          <a:ln w="12700">
+            <a:solidFill>
+              <a:srgbClr val="0369A1"/>
+            </a:solidFill>
+            <a:prstDash val="solid"/>
+          </a:ln>
+        </p:spPr>
+      </p:sp>
+      <p:pic>
+        <p:nvPicPr>
+          <p:cNvPr id="15" name="Image 1" descr="preencoded.png">    </p:cNvPr>
+          <p:cNvPicPr>
+            <a:picLocks noChangeAspect="1"/>
+          </p:cNvPicPr>
+          <p:nvPr/>
+        </p:nvPicPr>
+        <p:blipFill>
+          <a:blip r:embed="rId2"/>
+          <a:stretch>
+            <a:fillRect/>
+          </a:stretch>
+        </p:blipFill>
+        <p:spPr>
+          <a:xfrm>
+            <a:off x="7982661" y="128016"/>
+            <a:ext cx="201168" cy="201168"/>
+          </a:xfrm>
+          <a:prstGeom prst="rect">
+            <a:avLst/>
+          </a:prstGeom>
+        </p:spPr>
+      </p:pic>
+      <p:sp>
+        <p:nvSpPr>
+          <p:cNvPr id="16" name="Text 12"/>
+          <p:cNvSpPr txBox="1"/>
+          <p:nvPr/>
+        </p:nvSpPr>
+        <p:spPr>
+          <a:xfrm>
+            <a:off x="8238693" y="91440"/>
+            <a:ext cx="3367786" cy="274320"/>
+          </a:xfrm>
+          <a:prstGeom prst="rect">
+            <a:avLst/>
+          </a:prstGeom>
+          <a:noFill/>
+          <a:ln/>
+        </p:spPr>
+        <p:txBody>
+          <a:bodyPr wrap="square" lIns="0" tIns="0" rIns="0" bIns="0" rtlCol="0" anchor="ctr"/>
+          <a:lstStyle/>
+          <a:p>
+            <a:pPr indent="0" marL="0">
+              <a:buNone/>
+            </a:pPr>
+            <a:r>
+              <a:rPr lang="en-US" sz="1100" b="1" dirty="0">
+                <a:solidFill>
+                  <a:srgbClr val="075985"/>
+                </a:solidFill>
+                <a:latin typeface="Calibri" pitchFamily="34" charset="0"/>
+                <a:ea typeface="Calibri" pitchFamily="34" charset="-122"/>
+                <a:cs typeface="Calibri" pitchFamily="34" charset="-120"/>
+              </a:rPr>
+              <a:t>DA COMPRENDERE OGGI</a:t>
+            </a:r>
+            <a:pPr indent="0" marL="0">
+              <a:buNone/>
+            </a:pPr>
+            <a:r>
+              <a:rPr lang="en-US" sz="1100" dirty="0">
+                <a:solidFill>
+                  <a:srgbClr val="075985"/>
+                </a:solidFill>
+                <a:latin typeface="Calibri" pitchFamily="34" charset="0"/>
+                <a:ea typeface="Calibri" pitchFamily="34" charset="-122"/>
+                <a:cs typeface="Calibri" pitchFamily="34" charset="-120"/>
+              </a:rPr>
+              <a:t> · i componenti di PRG32</a:t>
+            </a:r>
+            <a:endParaRPr lang="en-US" sz="1100" dirty="0"/>
+          </a:p>
+        </p:txBody>
+      </p:sp>
+      <p:sp>
+        <p:nvSpPr>
           <p:cNvPr id="25" name="Slide Number Placeholder 0"/>
           <p:cNvSpPr>
             <a:spLocks noGrp="1"/>
@@ -14349,6 +15205,133 @@
       </p:sp>
       <p:sp>
         <p:nvSpPr>
+          <p:cNvPr id="24" name="Shape 22"/>
+          <p:cNvSpPr/>
+          <p:nvPr/>
+        </p:nvSpPr>
+        <p:spPr>
+          <a:xfrm>
+            <a:off x="7854645" y="91440"/>
+            <a:ext cx="3788410" cy="274320"/>
+          </a:xfrm>
+          <a:prstGeom prst="rect">
+            <a:avLst/>
+          </a:prstGeom>
+          <a:solidFill>
+            <a:srgbClr val="E0F2FE"/>
+          </a:solidFill>
+          <a:ln w="12700">
+            <a:solidFill>
+              <a:srgbClr val="0369A1"/>
+            </a:solidFill>
+            <a:prstDash val="solid"/>
+          </a:ln>
+        </p:spPr>
+      </p:sp>
+      <p:sp>
+        <p:nvSpPr>
+          <p:cNvPr id="25" name="Shape 23"/>
+          <p:cNvSpPr/>
+          <p:nvPr/>
+        </p:nvSpPr>
+        <p:spPr>
+          <a:xfrm>
+            <a:off x="7854645" y="91440"/>
+            <a:ext cx="73152" cy="274320"/>
+          </a:xfrm>
+          <a:prstGeom prst="rect">
+            <a:avLst/>
+          </a:prstGeom>
+          <a:solidFill>
+            <a:srgbClr val="0369A1"/>
+          </a:solidFill>
+          <a:ln w="12700">
+            <a:solidFill>
+              <a:srgbClr val="0369A1"/>
+            </a:solidFill>
+            <a:prstDash val="solid"/>
+          </a:ln>
+        </p:spPr>
+      </p:sp>
+      <p:pic>
+        <p:nvPicPr>
+          <p:cNvPr id="26" name="Image 0" descr="preencoded.png">    </p:cNvPr>
+          <p:cNvPicPr>
+            <a:picLocks noChangeAspect="1"/>
+          </p:cNvPicPr>
+          <p:nvPr/>
+        </p:nvPicPr>
+        <p:blipFill>
+          <a:blip r:embed="rId1"/>
+          <a:stretch>
+            <a:fillRect/>
+          </a:stretch>
+        </p:blipFill>
+        <p:spPr>
+          <a:xfrm>
+            <a:off x="7982661" y="128016"/>
+            <a:ext cx="201168" cy="201168"/>
+          </a:xfrm>
+          <a:prstGeom prst="rect">
+            <a:avLst/>
+          </a:prstGeom>
+        </p:spPr>
+      </p:pic>
+      <p:sp>
+        <p:nvSpPr>
+          <p:cNvPr id="27" name="Text 24"/>
+          <p:cNvSpPr txBox="1"/>
+          <p:nvPr/>
+        </p:nvSpPr>
+        <p:spPr>
+          <a:xfrm>
+            <a:off x="8238693" y="91440"/>
+            <a:ext cx="3367786" cy="274320"/>
+          </a:xfrm>
+          <a:prstGeom prst="rect">
+            <a:avLst/>
+          </a:prstGeom>
+          <a:noFill/>
+          <a:ln/>
+        </p:spPr>
+        <p:txBody>
+          <a:bodyPr wrap="square" lIns="0" tIns="0" rIns="0" bIns="0" rtlCol="0" anchor="ctr"/>
+          <a:lstStyle/>
+          <a:p>
+            <a:pPr indent="0" marL="0">
+              <a:buNone/>
+            </a:pPr>
+            <a:r>
+              <a:rPr lang="en-US" sz="1100" b="1" dirty="0">
+                <a:solidFill>
+                  <a:srgbClr val="075985"/>
+                </a:solidFill>
+                <a:latin typeface="Calibri" pitchFamily="34" charset="0"/>
+                <a:ea typeface="Calibri" pitchFamily="34" charset="-122"/>
+                <a:cs typeface="Calibri" pitchFamily="34" charset="-120"/>
+              </a:rPr>
+              <a:t>DA COMPRENDERE OGGI</a:t>
+            </a:r>
+            <a:pPr indent="0" marL="0">
+              <a:buNone/>
+            </a:pPr>
+            <a:r>
+              <a:rPr lang="en-US" sz="1100" dirty="0">
+                <a:solidFill>
+                  <a:srgbClr val="075985"/>
+                </a:solidFill>
+                <a:latin typeface="Calibri" pitchFamily="34" charset="0"/>
+                <a:ea typeface="Calibri" pitchFamily="34" charset="-122"/>
+                <a:cs typeface="Calibri" pitchFamily="34" charset="-120"/>
+              </a:rPr>
+              <a:t> · i componenti di PRG32</a:t>
+            </a:r>
+            <a:endParaRPr lang="en-US" sz="1100" dirty="0"/>
+          </a:p>
+        </p:txBody>
+      </p:sp>
+      <p:sp>
+        <p:nvSpPr>
           <p:cNvPr id="25" name="Slide Number Placeholder 0"/>
           <p:cNvSpPr>
             <a:spLocks noGrp="1"/>
@@ -14856,6 +15839,133 @@
               <a:t>Il kit PRG32 su breadboard</a:t>
             </a:r>
             <a:endParaRPr lang="en-US" sz="1200" dirty="0"/>
+          </a:p>
+        </p:txBody>
+      </p:sp>
+      <p:sp>
+        <p:nvSpPr>
+          <p:cNvPr id="15" name="Shape 12"/>
+          <p:cNvSpPr/>
+          <p:nvPr/>
+        </p:nvSpPr>
+        <p:spPr>
+          <a:xfrm>
+            <a:off x="7854645" y="91440"/>
+            <a:ext cx="3788410" cy="274320"/>
+          </a:xfrm>
+          <a:prstGeom prst="rect">
+            <a:avLst/>
+          </a:prstGeom>
+          <a:solidFill>
+            <a:srgbClr val="E0F2FE"/>
+          </a:solidFill>
+          <a:ln w="12700">
+            <a:solidFill>
+              <a:srgbClr val="0369A1"/>
+            </a:solidFill>
+            <a:prstDash val="solid"/>
+          </a:ln>
+        </p:spPr>
+      </p:sp>
+      <p:sp>
+        <p:nvSpPr>
+          <p:cNvPr id="16" name="Shape 13"/>
+          <p:cNvSpPr/>
+          <p:nvPr/>
+        </p:nvSpPr>
+        <p:spPr>
+          <a:xfrm>
+            <a:off x="7854645" y="91440"/>
+            <a:ext cx="73152" cy="274320"/>
+          </a:xfrm>
+          <a:prstGeom prst="rect">
+            <a:avLst/>
+          </a:prstGeom>
+          <a:solidFill>
+            <a:srgbClr val="0369A1"/>
+          </a:solidFill>
+          <a:ln w="12700">
+            <a:solidFill>
+              <a:srgbClr val="0369A1"/>
+            </a:solidFill>
+            <a:prstDash val="solid"/>
+          </a:ln>
+        </p:spPr>
+      </p:sp>
+      <p:pic>
+        <p:nvPicPr>
+          <p:cNvPr id="17" name="Image 1" descr="preencoded.png">    </p:cNvPr>
+          <p:cNvPicPr>
+            <a:picLocks noChangeAspect="1"/>
+          </p:cNvPicPr>
+          <p:nvPr/>
+        </p:nvPicPr>
+        <p:blipFill>
+          <a:blip r:embed="rId2"/>
+          <a:stretch>
+            <a:fillRect/>
+          </a:stretch>
+        </p:blipFill>
+        <p:spPr>
+          <a:xfrm>
+            <a:off x="7982661" y="128016"/>
+            <a:ext cx="201168" cy="201168"/>
+          </a:xfrm>
+          <a:prstGeom prst="rect">
+            <a:avLst/>
+          </a:prstGeom>
+        </p:spPr>
+      </p:pic>
+      <p:sp>
+        <p:nvSpPr>
+          <p:cNvPr id="18" name="Text 14"/>
+          <p:cNvSpPr txBox="1"/>
+          <p:nvPr/>
+        </p:nvSpPr>
+        <p:spPr>
+          <a:xfrm>
+            <a:off x="8238693" y="91440"/>
+            <a:ext cx="3367786" cy="274320"/>
+          </a:xfrm>
+          <a:prstGeom prst="rect">
+            <a:avLst/>
+          </a:prstGeom>
+          <a:noFill/>
+          <a:ln/>
+        </p:spPr>
+        <p:txBody>
+          <a:bodyPr wrap="square" lIns="0" tIns="0" rIns="0" bIns="0" rtlCol="0" anchor="ctr"/>
+          <a:lstStyle/>
+          <a:p>
+            <a:pPr indent="0" marL="0">
+              <a:buNone/>
+            </a:pPr>
+            <a:r>
+              <a:rPr lang="en-US" sz="1100" b="1" dirty="0">
+                <a:solidFill>
+                  <a:srgbClr val="075985"/>
+                </a:solidFill>
+                <a:latin typeface="Calibri" pitchFamily="34" charset="0"/>
+                <a:ea typeface="Calibri" pitchFamily="34" charset="-122"/>
+                <a:cs typeface="Calibri" pitchFamily="34" charset="-120"/>
+              </a:rPr>
+              <a:t>DA COMPRENDERE OGGI</a:t>
+            </a:r>
+            <a:pPr indent="0" marL="0">
+              <a:buNone/>
+            </a:pPr>
+            <a:r>
+              <a:rPr lang="en-US" sz="1100" dirty="0">
+                <a:solidFill>
+                  <a:srgbClr val="075985"/>
+                </a:solidFill>
+                <a:latin typeface="Calibri" pitchFamily="34" charset="0"/>
+                <a:ea typeface="Calibri" pitchFamily="34" charset="-122"/>
+                <a:cs typeface="Calibri" pitchFamily="34" charset="-120"/>
+              </a:rPr>
+              <a:t> · i componenti di PRG32</a:t>
+            </a:r>
+            <a:endParaRPr lang="en-US" sz="1100" dirty="0"/>
           </a:p>
         </p:txBody>
       </p:sp>
@@ -16674,6 +17784,133 @@
               <a:t>Il file della cartuccia è lo stesso in ogni colonna.</a:t>
             </a:r>
             <a:endParaRPr lang="en-US" sz="1500" dirty="0"/>
+          </a:p>
+        </p:txBody>
+      </p:sp>
+      <p:sp>
+        <p:nvSpPr>
+          <p:cNvPr id="5" name="Shape 2"/>
+          <p:cNvSpPr/>
+          <p:nvPr/>
+        </p:nvSpPr>
+        <p:spPr>
+          <a:xfrm>
+            <a:off x="7854645" y="91440"/>
+            <a:ext cx="3788410" cy="274320"/>
+          </a:xfrm>
+          <a:prstGeom prst="rect">
+            <a:avLst/>
+          </a:prstGeom>
+          <a:solidFill>
+            <a:srgbClr val="E0F2FE"/>
+          </a:solidFill>
+          <a:ln w="12700">
+            <a:solidFill>
+              <a:srgbClr val="0369A1"/>
+            </a:solidFill>
+            <a:prstDash val="solid"/>
+          </a:ln>
+        </p:spPr>
+      </p:sp>
+      <p:sp>
+        <p:nvSpPr>
+          <p:cNvPr id="6" name="Shape 3"/>
+          <p:cNvSpPr/>
+          <p:nvPr/>
+        </p:nvSpPr>
+        <p:spPr>
+          <a:xfrm>
+            <a:off x="7854645" y="91440"/>
+            <a:ext cx="73152" cy="274320"/>
+          </a:xfrm>
+          <a:prstGeom prst="rect">
+            <a:avLst/>
+          </a:prstGeom>
+          <a:solidFill>
+            <a:srgbClr val="0369A1"/>
+          </a:solidFill>
+          <a:ln w="12700">
+            <a:solidFill>
+              <a:srgbClr val="0369A1"/>
+            </a:solidFill>
+            <a:prstDash val="solid"/>
+          </a:ln>
+        </p:spPr>
+      </p:sp>
+      <p:pic>
+        <p:nvPicPr>
+          <p:cNvPr id="7" name="Image 0" descr="preencoded.png">    </p:cNvPr>
+          <p:cNvPicPr>
+            <a:picLocks noChangeAspect="1"/>
+          </p:cNvPicPr>
+          <p:nvPr/>
+        </p:nvPicPr>
+        <p:blipFill>
+          <a:blip r:embed="rId1"/>
+          <a:stretch>
+            <a:fillRect/>
+          </a:stretch>
+        </p:blipFill>
+        <p:spPr>
+          <a:xfrm>
+            <a:off x="7982661" y="128016"/>
+            <a:ext cx="201168" cy="201168"/>
+          </a:xfrm>
+          <a:prstGeom prst="rect">
+            <a:avLst/>
+          </a:prstGeom>
+        </p:spPr>
+      </p:pic>
+      <p:sp>
+        <p:nvSpPr>
+          <p:cNvPr id="8" name="Text 4"/>
+          <p:cNvSpPr txBox="1"/>
+          <p:nvPr/>
+        </p:nvSpPr>
+        <p:spPr>
+          <a:xfrm>
+            <a:off x="8238693" y="91440"/>
+            <a:ext cx="3367786" cy="274320"/>
+          </a:xfrm>
+          <a:prstGeom prst="rect">
+            <a:avLst/>
+          </a:prstGeom>
+          <a:noFill/>
+          <a:ln/>
+        </p:spPr>
+        <p:txBody>
+          <a:bodyPr wrap="square" lIns="0" tIns="0" rIns="0" bIns="0" rtlCol="0" anchor="ctr"/>
+          <a:lstStyle/>
+          <a:p>
+            <a:pPr indent="0" marL="0">
+              <a:buNone/>
+            </a:pPr>
+            <a:r>
+              <a:rPr lang="en-US" sz="1100" b="1" dirty="0">
+                <a:solidFill>
+                  <a:srgbClr val="075985"/>
+                </a:solidFill>
+                <a:latin typeface="Calibri" pitchFamily="34" charset="0"/>
+                <a:ea typeface="Calibri" pitchFamily="34" charset="-122"/>
+                <a:cs typeface="Calibri" pitchFamily="34" charset="-120"/>
+              </a:rPr>
+              <a:t>DA COMPRENDERE OGGI</a:t>
+            </a:r>
+            <a:pPr indent="0" marL="0">
+              <a:buNone/>
+            </a:pPr>
+            <a:r>
+              <a:rPr lang="en-US" sz="1100" dirty="0">
+                <a:solidFill>
+                  <a:srgbClr val="075985"/>
+                </a:solidFill>
+                <a:latin typeface="Calibri" pitchFamily="34" charset="0"/>
+                <a:ea typeface="Calibri" pitchFamily="34" charset="-122"/>
+                <a:cs typeface="Calibri" pitchFamily="34" charset="-120"/>
+              </a:rPr>
+              <a:t> · i componenti di PRG32</a:t>
+            </a:r>
+            <a:endParaRPr lang="en-US" sz="1100" dirty="0"/>
           </a:p>
         </p:txBody>
       </p:sp>
@@ -17251,6 +18488,133 @@
       </p:sp>
       <p:sp>
         <p:nvSpPr>
+          <p:cNvPr id="15" name="Shape 12"/>
+          <p:cNvSpPr/>
+          <p:nvPr/>
+        </p:nvSpPr>
+        <p:spPr>
+          <a:xfrm>
+            <a:off x="7854645" y="91440"/>
+            <a:ext cx="3788410" cy="274320"/>
+          </a:xfrm>
+          <a:prstGeom prst="rect">
+            <a:avLst/>
+          </a:prstGeom>
+          <a:solidFill>
+            <a:srgbClr val="E0F2FE"/>
+          </a:solidFill>
+          <a:ln w="12700">
+            <a:solidFill>
+              <a:srgbClr val="0369A1"/>
+            </a:solidFill>
+            <a:prstDash val="solid"/>
+          </a:ln>
+        </p:spPr>
+      </p:sp>
+      <p:sp>
+        <p:nvSpPr>
+          <p:cNvPr id="16" name="Shape 13"/>
+          <p:cNvSpPr/>
+          <p:nvPr/>
+        </p:nvSpPr>
+        <p:spPr>
+          <a:xfrm>
+            <a:off x="7854645" y="91440"/>
+            <a:ext cx="73152" cy="274320"/>
+          </a:xfrm>
+          <a:prstGeom prst="rect">
+            <a:avLst/>
+          </a:prstGeom>
+          <a:solidFill>
+            <a:srgbClr val="0369A1"/>
+          </a:solidFill>
+          <a:ln w="12700">
+            <a:solidFill>
+              <a:srgbClr val="0369A1"/>
+            </a:solidFill>
+            <a:prstDash val="solid"/>
+          </a:ln>
+        </p:spPr>
+      </p:sp>
+      <p:pic>
+        <p:nvPicPr>
+          <p:cNvPr id="17" name="Image 1" descr="preencoded.png">    </p:cNvPr>
+          <p:cNvPicPr>
+            <a:picLocks noChangeAspect="1"/>
+          </p:cNvPicPr>
+          <p:nvPr/>
+        </p:nvPicPr>
+        <p:blipFill>
+          <a:blip r:embed="rId2"/>
+          <a:stretch>
+            <a:fillRect/>
+          </a:stretch>
+        </p:blipFill>
+        <p:spPr>
+          <a:xfrm>
+            <a:off x="7982661" y="128016"/>
+            <a:ext cx="201168" cy="201168"/>
+          </a:xfrm>
+          <a:prstGeom prst="rect">
+            <a:avLst/>
+          </a:prstGeom>
+        </p:spPr>
+      </p:pic>
+      <p:sp>
+        <p:nvSpPr>
+          <p:cNvPr id="18" name="Text 14"/>
+          <p:cNvSpPr txBox="1"/>
+          <p:nvPr/>
+        </p:nvSpPr>
+        <p:spPr>
+          <a:xfrm>
+            <a:off x="8238693" y="91440"/>
+            <a:ext cx="3367786" cy="274320"/>
+          </a:xfrm>
+          <a:prstGeom prst="rect">
+            <a:avLst/>
+          </a:prstGeom>
+          <a:noFill/>
+          <a:ln/>
+        </p:spPr>
+        <p:txBody>
+          <a:bodyPr wrap="square" lIns="0" tIns="0" rIns="0" bIns="0" rtlCol="0" anchor="ctr"/>
+          <a:lstStyle/>
+          <a:p>
+            <a:pPr indent="0" marL="0">
+              <a:buNone/>
+            </a:pPr>
+            <a:r>
+              <a:rPr lang="en-US" sz="1100" b="1" dirty="0">
+                <a:solidFill>
+                  <a:srgbClr val="075985"/>
+                </a:solidFill>
+                <a:latin typeface="Calibri" pitchFamily="34" charset="0"/>
+                <a:ea typeface="Calibri" pitchFamily="34" charset="-122"/>
+                <a:cs typeface="Calibri" pitchFamily="34" charset="-120"/>
+              </a:rPr>
+              <a:t>DA COMPRENDERE OGGI</a:t>
+            </a:r>
+            <a:pPr indent="0" marL="0">
+              <a:buNone/>
+            </a:pPr>
+            <a:r>
+              <a:rPr lang="en-US" sz="1100" dirty="0">
+                <a:solidFill>
+                  <a:srgbClr val="075985"/>
+                </a:solidFill>
+                <a:latin typeface="Calibri" pitchFamily="34" charset="0"/>
+                <a:ea typeface="Calibri" pitchFamily="34" charset="-122"/>
+                <a:cs typeface="Calibri" pitchFamily="34" charset="-120"/>
+              </a:rPr>
+              <a:t> · i componenti di PRG32</a:t>
+            </a:r>
+            <a:endParaRPr lang="en-US" sz="1100" dirty="0"/>
+          </a:p>
+        </p:txBody>
+      </p:sp>
+      <p:sp>
+        <p:nvSpPr>
           <p:cNvPr id="25" name="Slide Number Placeholder 0"/>
           <p:cNvSpPr>
             <a:spLocks noGrp="1"/>
@@ -18630,6 +19994,133 @@
           </a:graphicData>
         </a:graphic>
       </p:graphicFrame>
+      <p:sp>
+        <p:nvSpPr>
+          <p:cNvPr id="4" name="Shape 1"/>
+          <p:cNvSpPr/>
+          <p:nvPr/>
+        </p:nvSpPr>
+        <p:spPr>
+          <a:xfrm>
+            <a:off x="7854645" y="91440"/>
+            <a:ext cx="3788410" cy="274320"/>
+          </a:xfrm>
+          <a:prstGeom prst="rect">
+            <a:avLst/>
+          </a:prstGeom>
+          <a:solidFill>
+            <a:srgbClr val="E0F2FE"/>
+          </a:solidFill>
+          <a:ln w="12700">
+            <a:solidFill>
+              <a:srgbClr val="0369A1"/>
+            </a:solidFill>
+            <a:prstDash val="solid"/>
+          </a:ln>
+        </p:spPr>
+      </p:sp>
+      <p:sp>
+        <p:nvSpPr>
+          <p:cNvPr id="5" name="Shape 2"/>
+          <p:cNvSpPr/>
+          <p:nvPr/>
+        </p:nvSpPr>
+        <p:spPr>
+          <a:xfrm>
+            <a:off x="7854645" y="91440"/>
+            <a:ext cx="73152" cy="274320"/>
+          </a:xfrm>
+          <a:prstGeom prst="rect">
+            <a:avLst/>
+          </a:prstGeom>
+          <a:solidFill>
+            <a:srgbClr val="0369A1"/>
+          </a:solidFill>
+          <a:ln w="12700">
+            <a:solidFill>
+              <a:srgbClr val="0369A1"/>
+            </a:solidFill>
+            <a:prstDash val="solid"/>
+          </a:ln>
+        </p:spPr>
+      </p:sp>
+      <p:pic>
+        <p:nvPicPr>
+          <p:cNvPr id="6" name="Image 0" descr="preencoded.png">    </p:cNvPr>
+          <p:cNvPicPr>
+            <a:picLocks noChangeAspect="1"/>
+          </p:cNvPicPr>
+          <p:nvPr/>
+        </p:nvPicPr>
+        <p:blipFill>
+          <a:blip r:embed="rId1"/>
+          <a:stretch>
+            <a:fillRect/>
+          </a:stretch>
+        </p:blipFill>
+        <p:spPr>
+          <a:xfrm>
+            <a:off x="7982661" y="128016"/>
+            <a:ext cx="201168" cy="201168"/>
+          </a:xfrm>
+          <a:prstGeom prst="rect">
+            <a:avLst/>
+          </a:prstGeom>
+        </p:spPr>
+      </p:pic>
+      <p:sp>
+        <p:nvSpPr>
+          <p:cNvPr id="7" name="Text 3"/>
+          <p:cNvSpPr txBox="1"/>
+          <p:nvPr/>
+        </p:nvSpPr>
+        <p:spPr>
+          <a:xfrm>
+            <a:off x="8238693" y="91440"/>
+            <a:ext cx="3367786" cy="274320"/>
+          </a:xfrm>
+          <a:prstGeom prst="rect">
+            <a:avLst/>
+          </a:prstGeom>
+          <a:noFill/>
+          <a:ln/>
+        </p:spPr>
+        <p:txBody>
+          <a:bodyPr wrap="square" lIns="0" tIns="0" rIns="0" bIns="0" rtlCol="0" anchor="ctr"/>
+          <a:lstStyle/>
+          <a:p>
+            <a:pPr indent="0" marL="0">
+              <a:buNone/>
+            </a:pPr>
+            <a:r>
+              <a:rPr lang="en-US" sz="1100" b="1" dirty="0">
+                <a:solidFill>
+                  <a:srgbClr val="075985"/>
+                </a:solidFill>
+                <a:latin typeface="Calibri" pitchFamily="34" charset="0"/>
+                <a:ea typeface="Calibri" pitchFamily="34" charset="-122"/>
+                <a:cs typeface="Calibri" pitchFamily="34" charset="-120"/>
+              </a:rPr>
+              <a:t>DA COMPRENDERE OGGI</a:t>
+            </a:r>
+            <a:pPr indent="0" marL="0">
+              <a:buNone/>
+            </a:pPr>
+            <a:r>
+              <a:rPr lang="en-US" sz="1100" dirty="0">
+                <a:solidFill>
+                  <a:srgbClr val="075985"/>
+                </a:solidFill>
+                <a:latin typeface="Calibri" pitchFamily="34" charset="0"/>
+                <a:ea typeface="Calibri" pitchFamily="34" charset="-122"/>
+                <a:cs typeface="Calibri" pitchFamily="34" charset="-120"/>
+              </a:rPr>
+              <a:t> · i componenti di PRG32</a:t>
+            </a:r>
+            <a:endParaRPr lang="en-US" sz="1100" dirty="0"/>
+          </a:p>
+        </p:txBody>
+      </p:sp>
       <p:sp>
         <p:nvSpPr>
           <p:cNvPr id="25" name="Slide Number Placeholder 0"/>

--- a/it/slides/01-Architettura_dei_Calcolatori-PRG32_e_PRG32-QT_Installazione.pptx
+++ b/it/slides/01-Architettura_dei_Calcolatori-PRG32_e_PRG32-QT_Installazione.pptx
@@ -122,14 +122,14 @@
   <p:extLst>
     <p:ext uri="{521415D9-36F7-43E2-AB2F-B90AF26B5E84}">
       <p14:sectionLst xmlns:p14="http://schemas.microsoft.com/office/powerpoint/2010/main">
-        <p14:section name="Apertura" id="{78167417-dd44-2dc1-c145-fd025a90b8b7}">
+        <p14:section name="Apertura" id="{c2f2e5d4-fb11-0885-923b-03887a813d7c}">
           <p14:sldIdLst>
             <p14:sldId id="256"/>
             <p14:sldId id="257"/>
             <p14:sldId id="258"/>
           </p14:sldIdLst>
         </p14:section>
-        <p14:section name="La piattaforma, in dettaglio" id="{c68b0083-a34a-c290-4b53-1b6e8a059a11}">
+        <p14:section name="La piattaforma, in dettaglio" id="{f53e39ea-2574-1e45-9a50-a75969c79316}">
           <p14:sldIdLst>
             <p14:sldId id="259"/>
             <p14:sldId id="260"/>
@@ -139,12 +139,12 @@
             <p14:sldId id="264"/>
           </p14:sldIdLst>
         </p14:section>
-        <p14:section name="Passo 2: installare la toolchain" id="{65ca51d0-2939-3212-bca7-e12aa4ff2c43}">
+        <p14:section name="Passo 2: installare la toolchain" id="{cd8f8e06-a931-e805-2cd1-071350fae97e}">
           <p14:sldIdLst>
             <p14:sldId id="265"/>
           </p14:sldIdLst>
         </p14:section>
-        <p14:section name="Quando qualcosa non funziona" id="{e8405835-893f-e27b-a30f-ab1e35793088}">
+        <p14:section name="Quando qualcosa non funziona" id="{1e0a7f90-9234-c943-1fe9-b7d0b39836f4}">
           <p14:sldIdLst>
             <p14:sldId id="266"/>
             <p14:sldId id="267"/>

--- a/it/slides/01-Architettura_dei_Calcolatori-PRG32_e_PRG32-QT_Installazione.pptx
+++ b/it/slides/01-Architettura_dei_Calcolatori-PRG32_e_PRG32-QT_Installazione.pptx
@@ -122,14 +122,14 @@
   <p:extLst>
     <p:ext uri="{521415D9-36F7-43E2-AB2F-B90AF26B5E84}">
       <p14:sectionLst xmlns:p14="http://schemas.microsoft.com/office/powerpoint/2010/main">
-        <p14:section name="Apertura" id="{c2f2e5d4-fb11-0885-923b-03887a813d7c}">
+        <p14:section name="Apertura" id="{b2f3297d-5be0-037f-515f-e05c71b4cbfd}">
           <p14:sldIdLst>
             <p14:sldId id="256"/>
             <p14:sldId id="257"/>
             <p14:sldId id="258"/>
           </p14:sldIdLst>
         </p14:section>
-        <p14:section name="La piattaforma, in dettaglio" id="{f53e39ea-2574-1e45-9a50-a75969c79316}">
+        <p14:section name="La piattaforma, in dettaglio" id="{899984a8-7c21-013d-579a-ab07ec35d43c}">
           <p14:sldIdLst>
             <p14:sldId id="259"/>
             <p14:sldId id="260"/>
@@ -139,12 +139,12 @@
             <p14:sldId id="264"/>
           </p14:sldIdLst>
         </p14:section>
-        <p14:section name="Passo 2: installare la toolchain" id="{cd8f8e06-a931-e805-2cd1-071350fae97e}">
+        <p14:section name="Passo 2: installare la toolchain" id="{c5881b03-3974-0707-c20f-c3ae1ef17b2e}">
           <p14:sldIdLst>
             <p14:sldId id="265"/>
           </p14:sldIdLst>
         </p14:section>
-        <p14:section name="Quando qualcosa non funziona" id="{1e0a7f90-9234-c943-1fe9-b7d0b39836f4}">
+        <p14:section name="Quando qualcosa non funziona" id="{d03d73d8-4592-6160-c5dd-ac967c0a8d80}">
           <p14:sldIdLst>
             <p14:sldId id="266"/>
             <p14:sldId id="267"/>
@@ -558,7 +558,7 @@
           <a:p>
             <a:r>
               <a:rPr lang="en-US" dirty="0"/>
-              <a:t>Questa lezione è un'officina, in due sensi: si lavora con le mani, e si esce con un posto in cui costruire cose. Qui non c'è teoria. Alla fine il vostro portatile esegue PRG32-QT, il compilatore per RISC-V è installato, e una cartuccia compilata da voi è ferma nel debugger. La citazione sull'ascia giustifica le due ore spese sugli strumenti: ogni lezione successiva presuppone che compilare ed eseguire un programma vi costi un comando e dieci secondi.
+              <a:t>Questa lezione è un'officina in entrambi i sensi della parola: una sessione di lavoro pratico, e il luogo in cui si svolgerà tutto il lavoro successivo. Non contiene teoria. Il suo esito è un ambiente configurato: PRG32-QT in funzione sul portatile dello studente, la toolchain RISC-V installata e verificata, e una prima cartuccia compilata dallo studente e fermata nel debugger. La citazione sull'affilare l'ascia giustifica le due ore dedicate agli strumenti: ogni lezione successiva presuppone che compilare ed eseguire un programma costi un solo comando e pochi secondi, così che l'attenzione vada alle idee e non alla procedura.
 Stato di apprendimento: DA COMPRENDERE OGGI, alla fine di questa lezione lo spiegate, lo seguite passo passo e lo applicate da soli; DA UTILIZZARE OGGI, oggi seguite e usate la ricetta; come funziona dentro si spiega più avanti, o non fa parte del corso; DA COMPRENDERE PIÙ AVANTI, riconoscete il nome e lo scopo; lo spiega una lezione successiva. Una slide senza etichetta è contesto: una storia, un esempio, una domanda, un esercizio.
 Stato di apprendimento di questa lezione. DA COMPRENDERE OGGI: i componenti di PRG32. DA UTILIZZARE OGGI: gli strumenti di PRG32, il debugger di PRG32-QT, il programma completo (si usa, non si studia, in questo corso). DA COMPRENDERE PIÙ AVANTI: contratto init/update/draw (Lezione 02); i registri (Lezione 02). Una slide senza etichetta è contesto: una storia, un esempio, una domanda, un esercizio.
 Per il docente: Novità del 2026/27: una lezione pratica. Gli studenti portano il portatile; alla fine ognuno ha PRG32-QT funzionante e una cartuccia compilata con la propria toolchain. I passi vengono dal README di PRG32, dalla documentazione di PRG32-QT e dal capitolo 3 del libro di PRG32. I comandi del passo 3 sono stati eseguiti su macOS con PRG32-QT; le installazioni su Windows e Linux seguono le istruzioni ufficiali e non sono state eseguite per queste slide. Chiedere agli studenti di fare a casa, prima della lezione, il lungo scaricamento del passo 2: la rete dell'aula non regge sessanta copie di ESP-IDF. I numeri di versione sono quelli di ottobre 2026: controllare le pagine dei rilasci prima della lezione.</a:t>
@@ -649,7 +649,7 @@
           <a:p>
             <a:r>
               <a:rPr lang="en-US" dirty="0"/>
-              <a:t>Un'idea sola spiega ogni installazione e quasi ogni problema. Il compilatore arriva con ESP-IDF, il kit di sviluppo di Espressif, installato per due chip: esp32c6, il kit, ed esp32c3, l'emulatore. Ma ESP-IDF non è attivo da solo: ogni nuovo terminale deve attivarlo prima che gli strumenti si possano trovare. Il riquadro a destra mostra il messaggio che incontrerete di sicuro, idf.py: command not found. Non significa che qualcosa è rotto. Significa che ESP-IDF non è attivo nel terminale in cui state scrivendo.
+              <a:t>Un'unica idea spiega ogni passo dell'installazione e quasi ogni guasto. Il compilatore è distribuito con ESP-IDF, l'ambiente di sviluppo di Espressif, installato per due chip: esp32c6, il kit, e esp32c3, il chip emulato. ESP-IDF, però, non è attivo da solo: ogni nuovo terminale deve attivarlo prima che i suoi strumenti si possano trovare. Il riquadro a destra mostra il messaggio che ogni studente prima o poi incontrerà, idf.py: command not found. Non indica un'installazione rotta; indica che ESP-IDF non è stato attivato nel terminale in uso.
 DA UTILIZZARE OGGI: gli strumenti di PRG32 (si usa, non si studia, in questo corso).
 Per il docente: Su Windows attivare significa aprire ESP-IDF PowerShell; su macOS e Linux, eseguire export.sh. Il sintomo è sempre lo stesso: idf.py, oppure riscv32-esp-elf-gcc, non trovato.</a:t>
             </a:r>
@@ -739,7 +739,7 @@
           <a:p>
             <a:r>
               <a:rPr lang="en-US" dirty="0"/>
-              <a:t>Leggete la tabella da sinistra a destra: che cosa vedete, che cosa significa, che cosa fare. La prima riga copre la maggior parte dei casi: idf.py: command not found significa che ESP-IDF non è attivo in questo terminale. No module named prg32 significa che non siete nella cartella PRG32. Una connessione rifiutata significa che PRG32-QT non è in esecuzione, o che un firewall blocca la porta 8080. Quando chiedete aiuto, incollate il comando e il messaggio completo come testo: una fotografia dello schermo non si può né cercare né copiare.
+              <a:t>La tabella si legge da sinistra a destra: sintomo, diagnosi, rimedio. La prima riga copre la maggior parte dei casi: idf.py: command not found significa che ESP-IDF non è attivo nel terminale corrente. No module named prg32 significa che il comando non è stato dato dalla cartella di PRG32. Una connessione rifiutata significa che PRG32-QT non è in esecuzione, o che un firewall blocca la porta 8080. Quando si chiede aiuto, comando e messaggio completo vanno forniti come testo: la fotografia di uno schermo non si può né cercare né copiare.
 DA UTILIZZARE OGGI: gli strumenti di PRG32 (si usa, non si studia, in questo corso).
 Per il docente: La prima riga copre la maggior parte dei casi. docs/usage/troubleshooting.md del repository di PRG32 ha l'elenco completo. Quando chiedete aiuto, incollate il comando e l'intero messaggio: mai una fotografia dello schermo.</a:t>
             </a:r>
@@ -829,7 +829,7 @@
           <a:p>
             <a:r>
               <a:rPr lang="en-US" dirty="0"/>
-              <a:t>Cinque verifiche, una per ogni cosa che avete fatto: PRG32-QT esegue un gioco dello Store; in un nuovo terminale il doctor mostra solo OK; cartridge build produce pong.prg32; upload-and-run lo avvia; in modalità debug pausa e passo funzionano. Se ne manca una, l'ultima colonna dice quale passo ripetere. Chi è bloccato venga a ricevimento o in laboratorio prima della Lezione 02, con il portatile.
+              <a:t>Cinque verifiche, una per ogni passo compiuto: PRG32-QT esegue un gioco dello Store; in un terminale nuovo il doctor riporta solo OK; cartridge build produce pong.prg32; upload-and-run lo avvia; e in modalità debug pausa e passo funzionano. Per ogni verifica che non riesce, l'ultima colonna indica il passo da ripetere. Chi resta bloccato venga al ricevimento o in laboratorio, con il portatile, prima della Lezione 02.
 Per il docente: Cinque spunte e l'officina è pronta. Chi è bloccato viene a ricevimento, o in laboratorio, prima della Lezione 02: con il portatile.</a:t>
             </a:r>
             <a:endParaRPr lang="en-US" dirty="0"/>
@@ -918,8 +918,8 @@
           <a:p>
             <a:r>
               <a:rPr lang="en-US" dirty="0"/>
-              <a:t>Pensate a che cosa implica «un nuovo terminale» prima di rispondere. Nulla è stato disinstallato, PRG32-QT non c'entra con questo comando, e per il doctor non serve alcuna scheda. L'attivazione dura quanto il terminale in cui è stata fatta, quindi un terminale nuovo parte senza. Il rimedio è quello della routine quotidiana: export.sh, oppure ESP-IDF PowerShell.
-La domanda separa due attività: compilare una cartuccia ed eseguirla. Il compilatore serve solo per la prima. La scheda e QEMU eseguono il vero firmware, che va compilato; PRG32-QT interpreta la cartuccia e ha un proprio debugger, quindi è l'unico host a cui non serve altro.
+              <a:t>Prima di rispondere alla prima domanda conviene chiedersi che cosa implica "un nuovo terminale". Nulla è stato disinstallato, PRG32-QT non ha alcun ruolo in questo comando, e il doctor non ha bisogno di una scheda. L'attivazione dura solo quanto il terminale in cui è stata eseguita, quindi un terminale nuovo comincia senza di essa. Il rimedio è quello di ogni giorno: export.sh, o la PowerShell di ESP-IDF.
+La seconda domanda separa due attività: compilare una cartuccia ed eseguirla. Il compilatore serve solo per la prima. La scheda e QEMU eseguono il firmware vero, che va a sua volta compilato; PRG32-QT interpreta la cartuccia e ha il suo debugger, ed è quindi l'unico host che non richiede altro.
 Per il docente: 1. Risposta: B. L'attivazione dura quanto il terminale: eseguite export.sh, oppure aprite ESP-IDF PowerShell.
 2. Risposta: C. PRG32-QT interpreta la cartuccia e ha un debugger integrato; il compilatore serve solo per compilare le cartucce.</a:t>
             </a:r>
@@ -1009,7 +1009,7 @@
           <a:p>
             <a:r>
               <a:rPr lang="en-US" dirty="0"/>
-              <a:t>La cartuccia non viene ricompilata, e non contiene tre programmi. Una cartuccia portabile non chiama il firmware a indirizzi fissi: passa da una tabella di funzioni, l'ABI, e ogni host fornisce quella tabella. È questo il significato dell'opzione --portable, e la ragione per cui il file è lo stesso in ogni colonna della tabella dei tre host.
+              <a:t>La cartuccia non viene ricompilata e non contiene tre programmi. Una cartuccia portabile non chiama il firmware a indirizzi fissi: chiama attraverso una tabella di funzioni, l'ABI, e ogni host fornisce la propria implementazione di quella tabella. È il significato dell'opzione --portable, e la ragione per cui il file è identico in ogni colonna della tabella che confronta i tre host. Il principio, un'interfaccia stabile che separa un programma dal sistema che lo esegue, tornerà più volte nel corso.
 Per il docente: Risposta: C. Una cartuccia portabile dipende soltanto dall'ABI, la tabella di funzioni del runtime, che ogni host fornisce.</a:t>
             </a:r>
             <a:endParaRPr lang="en-US" dirty="0"/>
@@ -1098,7 +1098,7 @@
           <a:p>
             <a:r>
               <a:rPr lang="en-US" dirty="0"/>
-              <a:t>Dieci termini che incontrerete in ogni documento su PRG32, con l'italiano usato di solito in aula. Tre meritano attenzione. Una toolchain è la catena di programmi che trasforma un sorgente in un eseguibile: compilatore, assemblatore, linker. To flash significa scrivere un programma nella memoria flash di un chip. Un host è la macchina su cui gira una cartuccia: la scheda, QEMU o PRG32-QT.</a:t>
+              <a:t>Dieci termini che ricorrono in ogni documento su PRG32, con l'italiano usato di solito in aula. Tre meritano particolare attenzione. Una toolchain è la sequenza di programmi che trasforma il codice sorgente in un eseguibile: compilatore, assemblatore e linker. Flashare significa scrivere un programma nella memoria flash di un chip. Un host è la macchina su cui gira una cartuccia: la scheda, QEMU o PRG32-QT.</a:t>
             </a:r>
             <a:endParaRPr lang="en-US" dirty="0"/>
           </a:p>
@@ -1186,7 +1186,7 @@
           <a:p>
             <a:r>
               <a:rPr lang="en-US" dirty="0"/>
-              <a:t>Quattro frasi da tenere. PRG32 è un runtime, un formato di cartuccia, uno strumento e uno Store, e una cartuccia gira invariata su tre host. PRG32-QT basta per giocare e fare debug; ESP-IDF e il repository servono per compilare. ESP-IDF va attivato in ogni nuovo terminale. E avete completato il ciclo di tutto il corso: compilare, inviare, fermare nel debugger. Le letture sono i file README dei due repository; la Lezione 02 usa questa officina per il vostro primo programma in assembly.
+              <a:t>Quattro proposizioni riassumono la lezione. PRG32 è un runtime, un formato di cartuccia, uno strumento e uno Store, e una cartuccia gira invariata su tre host. PRG32-QT basta per giocare e fare il debug; ESP-IDF e il repository servono per compilare. ESP-IDF va attivato in ogni nuovo terminale. E lo studente ha ora completato il ciclo su cui poggia l'intero corso: compilare, trasmettere, fermare nel debugger. Le letture consigliate sono i README dei due repository. La Lezione 02 usa questa officina per scrivere il primo programma in assembly.
 Stato di apprendimento, riepilogo. DA COMPRENDERE OGGI: i componenti di PRG32. DA UTILIZZARE OGGI: gli strumenti di PRG32, il debugger di PRG32-QT, il programma completo (si usa, non si studia, in questo corso). DA COMPRENDERE PIÙ AVANTI: contratto init/update/draw (Lezione 02); i registri (Lezione 02). Una slide senza etichetta è contesto: una storia, un esempio, una domanda, un esercizio.
 Per il docente: A seguire: Lezione 02, il primo programma in assembly RISC-V, scritto dagli studenti nell'officina appena allestita.</a:t>
             </a:r>
@@ -1276,7 +1276,7 @@
           <a:p>
             <a:r>
               <a:rPr lang="en-US" dirty="0"/>
-              <a:t>Cinque risultati, nell'ordine in cui li raggiungerete: un quadro della piattaforma, PRG32-QT installato, la toolchain installata e verificata, una cartuccia compilata e ferma nel debugger, e un elenco di rimedi per i guasti più comuni. Trattatelo come una lista di controllo. Se uscite dalla lezione con i soli primi due, potete già seguire il corso; il terzo e il quarto devono essere a posto prima della Lezione 02, quando scriverete il primo programma.</a:t>
+              <a:t>Cinque risultati, nell'ordine in cui si raggiungono: un quadro concettuale della piattaforma; PRG32-QT installato; la toolchain installata e verificata; una cartuccia compilata e fermata nel debugger; e un repertorio di rimedi ai guasti più comuni. L'elenco funziona anche da lista di controllo. I primi due risultati bastano per seguire il corso; il terzo e il quarto devono essere pronti prima della Lezione 02, in cui si scrive il primo programma.</a:t>
             </a:r>
             <a:endParaRPr lang="en-US" dirty="0"/>
           </a:p>
@@ -1364,7 +1364,7 @@
           <a:p>
             <a:r>
               <a:rPr lang="en-US" dirty="0"/>
-              <a:t>L'installazione ha quattro livelli, e non servono tutti. Il livello 1, PRG32-QT, richiede cinque minuti e permette di giocare con qualunque cartuccia e di farne il debug. Il livello 2, ESP-IDF e il repository di PRG32, è uno scaricamento corposo e permette di compilare cartucce proprie: serve a tutti prima della Lezione 02. Il livello 3, l'emulatore QEMU, e il livello 4, il kit fisico, sono facoltativi. La didascalia è la riga importante per chi si preoccupa dei costi: il corso si segue con i livelli 1 e 2, senza scheda.
+              <a:t>L'installazione è stratificata in quattro livelli, non tutti necessari. Il livello 1, PRG32-QT, richiede circa cinque minuti e permette di giocare e fare il debug di qualsiasi cartuccia. Il livello 2, ESP-IDF insieme al repository di PRG32, è uno scaricamento consistente e permette di compilare cartucce; è richiesto a tutti prima della Lezione 02. Il livello 3, l'emulatore QEMU, e il livello 4, il kit fisico, sono facoltativi. La didascalia risponde a una preoccupazione importante di equità: l'intero corso si può seguire con i soli livelli 1 e 2, senza acquistare alcun hardware.
 Per il docente: Il livello 1 richiede cinque minuti. Il livello 2 è uno scaricamento corposo e richiede da mezz'ora a un'ora: a casa, con una buona connessione. I livelli 3 e 4 sono per i curiosi, e per il laboratorio.</a:t>
             </a:r>
             <a:endParaRPr lang="en-US" dirty="0"/>
@@ -1453,7 +1453,7 @@
           <a:p>
             <a:r>
               <a:rPr lang="en-US" dirty="0"/>
-              <a:t>Il nome PRG32 indica quattro cose. Un firmware, il programma residente che possiede schermo, pulsanti e suono. Un formato di cartuccia, il vostro gioco in un solo piccolo file. Uno strumento sul portatile, il comando python3 -m prg32, che compila, carica e impacchetta. E uno Store, dove si condividono i giochi finiti. Il vostro codice è vero codice macchina RISC-V a 32 bit, e incontra il firmware attraverso un contratto di tre funzioni: init, chiamata una volta, poi update e draw, chiamate a ogni frame. La Lezione 02 parte esattamente da questo contratto.
+              <a:t>Il nome PRG32 designa quattro artefatti distinti. Un firmware: il programma residente che possiede lo schermo, i pulsanti e l'audio. Un formato di cartuccia: un gioco impacchettato in un solo piccolo file. Uno strumento sulla macchina di sviluppo, il comando python3 -m prg32, che compila, carica e impacchetta le cartucce. E uno Store, dove si pubblicano i giochi finiti. Il codice dello studente è vero codice macchina RISC-V a 32 bit, e interagisce con il firmware attraverso un contratto di tre funzioni: init, invocata una volta, e update e draw, invocate a ogni frame. La Lezione 02 prende questo contratto come punto di partenza.
 DA COMPRENDERE OGGI: i componenti di PRG32.
 Per il docente: github.com/riscv-prg32/PRG32. Il runtime chiama init una volta, poi update e draw a ogni frame: la Lezione 02 parte da questo contratto.</a:t>
             </a:r>
@@ -1543,7 +1543,7 @@
           <a:p>
             <a:r>
               <a:rPr lang="en-US" dirty="0"/>
-              <a:t>Seguite un programma da sinistra a destra. Scrivete un file sorgente in assembly o in C. Il compilatore della toolchain RISC-V lo trasforma in codice macchina. Il risultato è una cartuccia, un file con codice, dati e una breve intestazione. La cartuccia viene caricata via rete su un host, e lì il runtime ne chiama le tre funzioni. I primi tre riquadri stanno sul portatile e richiedono il livello 2; gli ultimi due sono un host, che può essere PRG32-QT, QEMU o la scheda. Lo stesso file gira su tutti e tre perché raggiunge il runtime attraverso una tabella di funzioni, l'ABI.
+              <a:t>La slide segue un programma lungo il suo ciclo di vita, da sinistra a destra. Si scrive un file sorgente in assembly o in C. La toolchain RISC-V lo traduce in codice macchina. Il risultato è una cartuccia: un file che contiene codice, dati e una breve intestazione. La cartuccia viene trasmessa in rete a un host, il cui runtime chiama poi i tre punti di ingresso. Le prime tre fasi avvengono sul portatile dello studente e richiedono il livello 2; le ultime due avvengono su un host, che può essere PRG32-QT, QEMU o la scheda. Lo stesso file gira su tutti e tre perché raggiunge il runtime in modo indiretto, attraverso una tabella di funzioni: l'interfaccia binaria, o ABI, di PRG32.
 DA COMPRENDERE OGGI: i componenti di PRG32.
 Per il docente: Il compilatore è riscv32-esp-elf-gcc, installato da ESP-IDF. La cartuccia viene caricata all'indirizzo 0x40800000 e raggiunge il runtime attraverso una tabella di funzioni, l'ABI: per questo lo stesso file gira su tre host diversi.</a:t>
             </a:r>
@@ -1633,7 +1633,7 @@
           <a:p>
             <a:r>
               <a:rPr lang="en-US" dirty="0"/>
-              <a:t>Il kit è una piccola console montata su breadboard. Il suo cuore è un ESP32-C6, un chip con un core RISC-V a 160 MHz e il Wi-Fi. Attorno ci sono un display a colori da 2,8 pollici, uno o due amplificatori audio, un joystick e qualche pulsante, ciascuno collegato direttamente a un piedino del chip. Notate i due numeri dello schermo: il pannello ha 320 per 240 pixel, e i giochi disegnano in un'area di 320 per 200. Il gioco arriva alla scheda via Wi-Fi. Per seguire il corso il kit non serve; il laboratorio ne ha alcuni.
+              <a:t>Il kit è una piccola console montata su breadboard. Il suo cuore è un Espressif ESP32-C6, un chip con un solo core RISC-V a 160 MHz e una radio Wi-Fi integrata. Intorno ci sono un display a colori da 2,8 pollici, uno o due amplificatori audio, un joystick e alcuni pulsanti, ciascuno collegato direttamente a un piedino del chip. Vanno distinti due numeri relativi allo schermo: il pannello ha 320 per 240 pixel, mentre i giochi disegnano in un'area di 320 per 200. Le cartucce raggiungono la scheda via Wi-Fi. Un kit personale non è necessario per seguire il corso; il laboratorio ne mette a disposizione alcuni.
 DA COMPRENDERE OGGI: i componenti di PRG32.
 Per il docente: Display: ILI9341 su SPI. Audio: MAX98357A su I2S. L'elenco dei componenti e i collegamenti sono in docs/hardware del repository di PRG32. Il laboratorio dispone di kit.</a:t>
             </a:r>
@@ -1723,7 +1723,7 @@
           <a:p>
             <a:r>
               <a:rPr lang="en-US" dirty="0"/>
-              <a:t>Una cartuccia, tre host. Leggete la tabella per righe. Sulla scheda e in QEMU il codice gira in modo nativo, su un chip vero o emulato; in PRG32-QT è interpretato, un'istruzione dopo l'altra. Scheda e QEMU richiedono la toolchain; PRG32-QT no, per giocare e fare debug. L'esecuzione passo-passo richiede strumenti aggiuntivi sui primi due, ed è integrata nel terzo. Una regola pratica: usate la scheda quando volete la verità sul tempo, e PRG32-QT quando volete la verità su un registro.
+              <a:t>Una cartuccia, tre host, confrontati riga per riga. Sulla scheda e in QEMU il codice gira in modo nativo, rispettivamente su un chip fisico e su uno emulato; in PRG32-QT è interpretato, un'istruzione alla volta. La scheda e QEMU richiedono la toolchain, PRG32-QT no, né per giocare né per il debug. L'esecuzione passo-passo richiede strumenti aggiuntivi sui primi due host ed è integrata nel terzo. Ne segue un'utile regola pratica: la scheda è l'autorità sul tempo, PRG32-QT l'autorità sul contenuto di un registro.
 DA COMPRENDERE OGGI: i componenti di PRG32.
 Per il docente: Usate la scheda quando volete la verità sul tempo, e PRG32-QT quando volete la verità su un registro. Perché un ESP32-C3 in QEMU? Espressif mantiene per quel chip un emulatore maturo e con grafica; esegue le stesse istruzioni RISC-V, e la cartuccia non se ne accorge.</a:t>
             </a:r>
@@ -1813,7 +1813,7 @@
           <a:p>
             <a:r>
               <a:rPr lang="en-US" dirty="0"/>
-              <a:t>PRG32-QT è la console in forma di applicazione: contiene un interprete di RV32IMAC e offre alla cartuccia le stesse funzioni del firmware. Tre cose da ricordare. I profili di velocità in Settings: Accurate, quello predefinito, temporizzato come l'ESP32-C6; Optimal, trenta frame al secondo; Unlimited. Il navigatore dello Store, che scarica ed esegue le cartucce pubblicate. E il debugger, che mostra assembly, registri e memoria ed esegue un'istruzione alla volta. Accurate è il profilo da tenere: vi dice quando il vostro programma sarebbe troppo lento sul chip vero.
+              <a:t>PRG32-QT è la console realizzata come applicazione: contiene un interprete dell'insieme di istruzioni RV32IMAC e offre alla cartuccia gli stessi servizi del firmware. Contano tre funzionalità. I profili di velocità in Settings: Accurate, il predefinito, che riproduce i tempi dell'ESP32-C6; Optimal, a trenta frame al secondo; e Unlimited. Il browser dello Store, che scarica ed esegue le cartucce pubblicate. E il debugger, che mostra il disassemblato, i registri e la memoria, ed esegue un'istruzione alla volta. Accurate è il profilo da tenere, perché rivela quando un programma sarebbe troppo lento sul chip reale.
 DA COMPRENDERE OGGI: i componenti di PRG32.
 Per il docente: github.com/riscv-prg32/PRG32-QT. Accurate addebita a ogni istruzione e a ogni chiamata un costo in cicli di un clock a 160 MHz: non è un modello esatto al ciclo del chip, ma è abbastanza vicino da far vedere quando un frame è in ritardo.</a:t>
             </a:r>
@@ -1903,7 +1903,7 @@
           <a:p>
             <a:r>
               <a:rPr lang="en-US" dirty="0"/>
-              <a:t>Sulla tastiera il joystick sono i tasti freccia, oppure W A S D; il pulsante A è Z oppure J; il pulsante B è X oppure K; Start e Select sono Invio oppure Spazio. In PRG32-QT, Esc lascia il gioco e torna a Setup. Un dettaglio di QEMU sorprende tutti la prima volta: i tasti vanno battuti nel terminale da cui QEMU è stato avviato, non nella finestra che mostra l'immagine. Se un gioco in QEMU sembra morto, cliccate sul terminale.
+              <a:t>Sulla tastiera il joystick corrisponde ai tasti freccia o a W, A, S, D; il pulsante A a Z o J; il pulsante B a X o K; Start e Select a Invio o Spazio. In PRG32-QT, Esc esce dal gioco e torna a Setup. Una proprietà di QEMU sorprende regolarmente chi lo usa la prima volta: i tasti vanno premuti nel terminale da cui QEMU è stato avviato, non nella finestra che mostra l'immagine. Un gioco che in QEMU sembra non rispondere di solito richiede solo di dare il fuoco al terminale.
 DA COMPRENDERE OGGI: i componenti di PRG32.
 Per il docente: Un controller di gioco USB o Bluetooth viene riconosciuto da PRG32-QT appena lo si collega. QEMU legge la tastiera dal terminale che lo ha lanciato, non dalla finestra con l'immagine: la sorpresa classica.</a:t>
             </a:r>
@@ -2983,7 +2983,7 @@
                 <a:ea typeface="Calibri" pitchFamily="34" charset="-122"/>
                 <a:cs typeface="Calibri" pitchFamily="34" charset="-120"/>
               </a:rPr>
-              <a:t>01-Architettura_dei_Calcolatori-PRG32_e_PRG32-QT_Installazione-Codice.pptx</a:t>
+              <a:t>01-Architettura_dei_Calcolatori-PRG32_e_PRG32-QT_Installazione-Lab.pptx</a:t>
             </a:r>
             <a:endParaRPr lang="en-US" sz="1300" dirty="0"/>
           </a:p>

--- a/it/slides/01-Architettura_dei_Calcolatori-PRG32_e_PRG32-QT_Installazione.pptx
+++ b/it/slides/01-Architettura_dei_Calcolatori-PRG32_e_PRG32-QT_Installazione.pptx
@@ -126,14 +126,14 @@
   <p:extLst>
     <p:ext uri="{521415D9-36F7-43E2-AB2F-B90AF26B5E84}">
       <p14:sectionLst xmlns:p14="http://schemas.microsoft.com/office/powerpoint/2010/main">
-        <p14:section name="Apertura" id="{634021d1-dcfe-c598-f53a-8cb5538e5e5d}">
+        <p14:section name="Apertura" id="{5abd7051-d5fd-3e65-7f7b-3bdc74d63b42}">
           <p14:sldIdLst>
             <p14:sldId id="256"/>
             <p14:sldId id="257"/>
             <p14:sldId id="258"/>
           </p14:sldIdLst>
         </p14:section>
-        <p14:section name="Prima di cominciare: le parole di oggi" id="{fa3e48d2-4e48-8f57-e3ab-64dc5569e449}">
+        <p14:section name="Prima di cominciare: le parole di oggi" id="{0748a695-1dff-c17d-388d-8c1607a3eae4}">
           <p14:sldIdLst>
             <p14:sldId id="259"/>
             <p14:sldId id="260"/>
@@ -141,7 +141,7 @@
             <p14:sldId id="262"/>
           </p14:sldIdLst>
         </p14:section>
-        <p14:section name="La piattaforma, in dettaglio" id="{23b7306f-b487-f212-6324-b110b553c871}">
+        <p14:section name="La piattaforma, in dettaglio" id="{2ea9ddfe-c4ea-5ad2-825c-5924cba26bb9}">
           <p14:sldIdLst>
             <p14:sldId id="263"/>
             <p14:sldId id="264"/>
@@ -151,12 +151,12 @@
             <p14:sldId id="268"/>
           </p14:sldIdLst>
         </p14:section>
-        <p14:section name="Passo 2: installare la toolchain" id="{a3806342-c581-a4c7-95d6-290e00220a46}">
+        <p14:section name="Passo 2: installare la toolchain" id="{b6763170-4603-cacd-5f8c-c85e184a4a32}">
           <p14:sldIdLst>
             <p14:sldId id="269"/>
           </p14:sldIdLst>
         </p14:section>
-        <p14:section name="Quando qualcosa non funziona" id="{1607a89a-616f-aade-8eca-0bb4c755365b}">
+        <p14:section name="Quando qualcosa non funziona" id="{f7a85e98-72a7-2057-f261-b07c5d5ab161}">
           <p14:sldIdLst>
             <p14:sldId id="270"/>
             <p14:sldId id="271"/>
@@ -573,6 +573,7 @@
               <a:t>Questa lezione è un'officina in entrambi i sensi della parola: una sessione di lavoro pratico, e il luogo in cui si svolgerà tutto il lavoro successivo. Non contiene teoria. Il suo esito è un ambiente configurato: PRG32-QT in funzione sul portatile dello studente, la toolchain RISC-V installata e verificata, e una prima cartuccia compilata dallo studente e fermata nel debugger. La citazione sull'affilare l'ascia giustifica le due ore dedicate agli strumenti: ogni lezione successiva presuppone che compilare ed eseguire un programma costi un solo comando e pochi secondi, così che l'attenzione vada alle idee e non alla procedura.
 Stato di apprendimento: DA COMPRENDERE OGGI, alla fine di questa lezione lo spiegate, lo seguite passo passo e lo applicate da soli; DA UTILIZZARE OGGI, oggi seguite e usate la ricetta; come funziona dentro si spiega più avanti, o non fa parte del corso; DA COMPRENDERE PIÙ AVANTI, riconoscete il nome e lo scopo; lo spiega una lezione successiva. Una slide senza etichetta è contesto: una storia, un esempio, una domanda, un esercizio.
 Stato di apprendimento di questa lezione. DA COMPRENDERE OGGI: programma, sorgente, codice macchina; i componenti di PRG32. DA UTILIZZARE OGGI: il terminale, gli strumenti di PRG32, il debugger di PRG32-QT, il programma completo (si usa, non si studia, in questo corso). DA COMPRENDERE PIÙ AVANTI: contratto init/update/draw (Lezione 02); i registri (Lezione 02). Una slide senza etichetta è contesto: una storia, un esempio, una domanda, un esercizio.
+Percorso. I risultati di oggi: (1) spiegare il percorso da un file sorgente a una cartuccia in esecuzione: sorgente, traduttore, codice macchina, cartuccia, host; (2) eseguire una cartuccia in PRG32-QT e compilarne una dal terminale. Si appoggia su: la Lezione 00, e Partire da zero per chi non ha mai programmato. Prossimo passo: Lezione 02, Primo contatto: l'assembly RISC-V su PRG32.
 Per il docente: Novità del 2026/27: una lezione pratica. Gli studenti portano il portatile; alla fine ognuno ha PRG32-QT funzionante e una cartuccia compilata con la propria toolchain. I passi vengono dal README di PRG32, dalla documentazione di PRG32-QT e dal capitolo 3 del libro di PRG32. I comandi del passo 3 sono stati eseguiti su macOS con PRG32-QT; le installazioni su Windows e Linux seguono le istruzioni ufficiali e non sono state eseguite per queste slide. Chiedere agli studenti di fare a casa, prima della lezione, il lungo scaricamento del passo 2: la rete dell'aula non regge sessanta copie di ESP-IDF. I numeri di versione sono quelli di ottobre 2026: controllare le pagine dei rilasci prima della lezione.</a:t>
             </a:r>
             <a:endParaRPr lang="en-US" dirty="0"/>
@@ -1649,7 +1650,7 @@
             <a:r>
               <a:rPr lang="en-US" dirty="0"/>
               <a:t>Quattro proposizioni riassumono la lezione. PRG32 è un runtime, un formato di cartuccia, uno strumento e uno Store, e una cartuccia gira invariata su tre host. PRG32-QT basta per giocare e fare il debug; ESP-IDF e il repository servono per compilare. ESP-IDF va attivato in ogni nuovo terminale. E lo studente ha ora completato il ciclo su cui poggia l'intero corso: compilare, trasmettere, fermare nel debugger. Le letture consigliate sono i README dei due repository. La Lezione 02 usa questa officina per scrivere il primo programma in assembly.
-Stato di apprendimento, riepilogo. DA COMPRENDERE OGGI: programma, sorgente, codice macchina; i componenti di PRG32. DA UTILIZZARE OGGI: il terminale, gli strumenti di PRG32, il debugger di PRG32-QT, il programma completo (si usa, non si studia, in questo corso). DA COMPRENDERE PIÙ AVANTI: contratto init/update/draw (Lezione 02); i registri (Lezione 02). Una slide senza etichetta è contesto: una storia, un esempio, una domanda, un esercizio.
+Stato di apprendimento, riepilogo. DA COMPRENDERE OGGI: programma, sorgente, codice macchina; i componenti di PRG32. DA UTILIZZARE OGGI: il terminale, gli strumenti di PRG32, il debugger di PRG32-QT, il programma completo (si usa, non si studia, in questo corso). DA COMPRENDERE PIÙ AVANTI: contratto init/update/draw (Lezione 02); i registri (Lezione 02). Una slide senza etichetta è contesto: una storia, un esempio, una domanda, un esercizio. Il filo della lezione: Ora possedete l'intero ciclo: scrivere un sorgente, tradurlo, inviare la cartuccia a un host, fermarla nel debugger. Prossimo passo: scrivere il sorgente da voi. Biglietto d'uscita (da due a quattro minuti, da soli, su carta): 1. Mettete in ordine questi quattro elementi e dite in una riga che cosa fa ciascuno: la cartuccia, il file sorgente, il runtime di un host, l'assemblatore. 2. In un nuovo terminale scrivete python3 -m prg32 doctor e leggete: idf.py: command not found. Che cosa vi dice il messaggio, e che cosa fate per prima cosa?
 Per il docente: A seguire: Lezione 02, il primo programma in assembly RISC-V, scritto dagli studenti nell'officina appena allestita.</a:t>
             </a:r>
             <a:endParaRPr lang="en-US" dirty="0"/>
